--- a/content/W04/D1/slides/C2_W04_D01_half1_STUDENT.pptx
+++ b/content/W04/D1/slides/C2_W04_D01_half1_STUDENT.pptx
@@ -895,17 +895,22 @@
           <a:lstStyle/>
           <a:p>
             <a:r>
-              <a:t>LIVE, 3 minutes. Point at the launch week line; read the before trajectory (hours flat around</a:t>
-            </a:r>
-          </a:p>
-          <a:p>
-            <a:r>
-              <a:t>19,500 a week, trips per hour around 1.90) and the after trajectory (hours rising to about</a:t>
-            </a:r>
-          </a:p>
-          <a:p>
-            <a:r>
-              <a:t>25,000 by week 12, trips per hour settling near 1.58). Then say: twelve weeks of data say the</a:t>
+              <a:t>LIVE, 3 minutes. Point at the launch week line; read the before trajectory (hours between about</a:t>
+            </a:r>
+          </a:p>
+          <a:p>
+            <a:r>
+              <a:t>19,400 and 20,200 a week, trips per hour wandering between 1.88 and 1.93) and the after trajectory</a:t>
+            </a:r>
+          </a:p>
+          <a:p>
+            <a:r>
+              <a:t>(hours between about 23,800 and 24,900 a week, trips per hour 1.64 in the launch week and then</a:t>
+            </a:r>
+          </a:p>
+          <a:p>
+            <a:r>
+              <a:t>between 1.56 and 1.59). Then say: twelve weeks of data say the</a:t>
             </a:r>
           </a:p>
           <a:p>
@@ -1075,12 +1080,12 @@
           </a:p>
           <a:p>
             <a:r>
-              <a:t>is less sharp on the city (ratio down to 1.58), because 180 drivers of 1,200 are the ones who</a:t>
-            </a:r>
-          </a:p>
-          <a:p>
-            <a:r>
-              <a:t>shifted. Chapter 3 finds them.</a:t>
+              <a:t>is less sharp on the city (ratio down to 1.58), because the six were chosen to show the</a:t>
+            </a:r>
+          </a:p>
+          <a:p>
+            <a:r>
+              <a:t>mechanism and two of them are drivers like E and F. Chapter 3 finds how many the city has.</a:t>
             </a:r>
           </a:p>
           <a:p>
@@ -1830,7 +1835,7 @@
           </a:p>
           <a:p>
             <a:r>
-              <a:t>weeks, Rs 1.16 crore saved.</a:t>
+              <a:t>weeks if every driver had behaved the same, which the redesign cannot promise.</a:t>
             </a:r>
           </a:p>
           <a:p>
@@ -3006,21 +3011,6 @@
           <a:p>
             <a:r>
               <a:t>story: hours up, requests down (an outer zone), most declined.</a:t>
-            </a:r>
-          </a:p>
-          <a:p>
-            <a:r>
-              <a:t>Note on the correction: the case file prints 1.49 for the after ratio, which assumed 110 trips in</a:t>
-            </a:r>
-          </a:p>
-          <a:p>
-            <a:r>
-              <a:t>the six after rows. The row values as printed sum to 88, which gives 1.19; the pack uses the</a:t>
-            </a:r>
-          </a:p>
-          <a:p>
-            <a:r>
-              <a:t>computed value.</a:t>
             </a:r>
           </a:p>
           <a:p>
@@ -9572,7 +9562,7 @@
                 </a:solidFill>
                 <a:latin typeface="Calibri"/>
               </a:rPr>
-              <a:t>The dashed line marks the launch week. Peak online hours rose; trips per peak online hour fell. The same picture extends the twelve-row story: it was not two unusual weeks.</a:t>
+              <a:t>The dashed line shows the launch week. Peak online hours rose; trips per peak online hour fell. The same picture extends the twelve-row story: it was not two unusual weeks.</a:t>
             </a:r>
           </a:p>
         </p:txBody>
@@ -11134,7 +11124,7 @@
         <p:spPr>
           <a:xfrm>
             <a:off x="530352" y="4431792"/>
-            <a:ext cx="11130991" cy="1048512"/>
+            <a:ext cx="11130991" cy="1324864"/>
           </a:xfrm>
           <a:prstGeom prst="rect">
             <a:avLst/>
@@ -11159,7 +11149,7 @@
                 </a:solidFill>
                 <a:latin typeface="Calibri"/>
               </a:rPr>
-              <a:t>The groupby runs on driver_weeks with the before/after mask on week_start; the ratio is taken as sum(trips) / sum(hours), never a mean of per-driver ratios. The second route is the same totals in SQL, in notebook 03.</a:t>
+              <a:t>The groupby runs on driver_weeks with the before/after mask on week_start; the ratio is taken as sum(trips) / sum(hours), never a mean of per-driver ratios. The six drivers of the hand count fell further, to 1.19, because they were chosen to show the mechanism: two of the six, E and F, logged hours with almost no trips, a third of the sample. Chapter 3 counts how many such drivers the city has.</a:t>
             </a:r>
           </a:p>
         </p:txBody>
@@ -14920,7 +14910,7 @@
         <p:spPr>
           <a:xfrm>
             <a:off x="6370167" y="1682496"/>
-            <a:ext cx="5291175" cy="1874519"/>
+            <a:ext cx="5291175" cy="2230120"/>
           </a:xfrm>
           <a:prstGeom prst="roundRect">
             <a:avLst>
@@ -14968,7 +14958,7 @@
         <p:spPr>
           <a:xfrm>
             <a:off x="6516471" y="1810512"/>
-            <a:ext cx="45720" cy="1618487"/>
+            <a:ext cx="45720" cy="1974088"/>
           </a:xfrm>
           <a:prstGeom prst="roundRect">
             <a:avLst>
@@ -15014,7 +15004,7 @@
         <p:spPr>
           <a:xfrm>
             <a:off x="6717639" y="1801368"/>
-            <a:ext cx="4724247" cy="1691639"/>
+            <a:ext cx="4724247" cy="2047239"/>
           </a:xfrm>
           <a:prstGeom prst="rect">
             <a:avLst/>
@@ -15043,7 +15033,7 @@
                 </a:solidFill>
                 <a:latin typeface="Calibri"/>
               </a:rPr>
-              <a:t>drivers (1,200 rows, 140 joined after the launch), driver_weeks (one row per driver per active week with hours, requests, accepted, cancels, trips, bookings, top-up), zone_weeks (12 zones, 12 weeks, with rider requests, fulfilled and median wait). </a:t>
+              <a:t>drivers (1,200 rows, 140 joined after the launch), driver_weeks (one row per driver per week on the app, with peak hours, offers, accepted, driver cancels, trips, hours with no trip, bookings, top-up), zone_weeks (12 zones, 12 weeks, with rider requests, fulfilled and median wait). A request one driver declines is offered to the next, so driver_weeks counts offers and zone_weeks counts rider requests. </a:t>
             </a:r>
             <a:r>
               <a:rPr sz="1000" b="1" i="0">
@@ -15092,7 +15082,7 @@
         </p:nvSpPr>
         <p:spPr>
           <a:xfrm>
-            <a:off x="6370167" y="3721607"/>
+            <a:off x="6370167" y="4077208"/>
             <a:ext cx="45720" cy="574040"/>
           </a:xfrm>
           <a:prstGeom prst="roundRect">
@@ -15138,7 +15128,7 @@
         </p:nvSpPr>
         <p:spPr>
           <a:xfrm>
-            <a:off x="6626199" y="3721607"/>
+            <a:off x="6626199" y="4077208"/>
             <a:ext cx="4980279" cy="574040"/>
           </a:xfrm>
           <a:prstGeom prst="rect">
@@ -16293,8 +16283,8 @@
         </p:blipFill>
         <p:spPr>
           <a:xfrm>
-            <a:off x="3449362" y="1664208"/>
-            <a:ext cx="5292969" cy="3200400"/>
+            <a:off x="3596389" y="1664208"/>
+            <a:ext cx="4998915" cy="3022600"/>
           </a:xfrm>
           <a:prstGeom prst="rect">
             <a:avLst/>
@@ -16309,7 +16299,7 @@
         </p:nvSpPr>
         <p:spPr>
           <a:xfrm>
-            <a:off x="530352" y="4901184"/>
+            <a:off x="530352" y="4723384"/>
             <a:ext cx="11130991" cy="316992"/>
           </a:xfrm>
           <a:prstGeom prst="rect">
@@ -16344,8 +16334,8 @@
         </p:nvSpPr>
         <p:spPr>
           <a:xfrm>
-            <a:off x="530352" y="5227320"/>
-            <a:ext cx="11130991" cy="807720"/>
+            <a:off x="530352" y="5049520"/>
+            <a:ext cx="11130991" cy="985520"/>
           </a:xfrm>
           <a:prstGeom prst="roundRect">
             <a:avLst>
@@ -16392,8 +16382,8 @@
         </p:nvSpPr>
         <p:spPr>
           <a:xfrm>
-            <a:off x="676656" y="5355336"/>
-            <a:ext cx="45720" cy="551688"/>
+            <a:off x="676656" y="5177536"/>
+            <a:ext cx="45720" cy="729487"/>
           </a:xfrm>
           <a:prstGeom prst="roundRect">
             <a:avLst>
@@ -16438,8 +16428,8 @@
         </p:nvSpPr>
         <p:spPr>
           <a:xfrm>
-            <a:off x="877824" y="5346192"/>
-            <a:ext cx="10564063" cy="624840"/>
+            <a:off x="877824" y="5168392"/>
+            <a:ext cx="10564063" cy="802640"/>
           </a:xfrm>
           <a:prstGeom prst="rect">
             <a:avLst/>
@@ -16468,7 +16458,7 @@
                 </a:solidFill>
                 <a:latin typeface="Calibri"/>
               </a:rPr>
-              <a:t>180 drivers of the 1,200 enrolled, 15 percent of the base. Their peak online hours after the launch are about 2.1 times their hours before. Their peak trips are about 88 percent of their trips before, down 12 percent. 70 percent of their new hours are logged in the three outer zones (Shamshabad, Rajendranagar, Patancheru). This is the plant the scheme pays for, and the room found it in the data.</a:t>
+              <a:t>180 drivers of the 1,200 enrolled, 15 percent of the base. Their peak online hours after the launch are about 2.1 times their hours before. Their peak trips are about 88 percent of their trips before, down 12 percent. 72 percent of their new hours are logged in the three outer zones (Shamshabad, Rajendranagar, Patancheru). This is the idle tail the scheme pays for, found in the data. The hand count's six held two such drivers, a third of the sample against 15 percent of drivers city-wide, which is why the six fell to 1.19 while the city fell to 1.58.</a:t>
             </a:r>
           </a:p>
         </p:txBody>
@@ -17279,7 +17269,7 @@
                 </a:solidFill>
                 <a:latin typeface="Consolas"/>
               </a:rPr>
-              <a:t>after["acceptance"] = after["peak_accepted"] / after["peak_requests"]</a:t>
+              <a:t>after["acceptance"] = after["peak_accepted"] / after["peak_offers"]</a:t>
             </a:r>
           </a:p>
           <a:p>
@@ -17350,7 +17340,7 @@
                 </a:solidFill>
                 <a:latin typeface="Calibri"/>
               </a:rPr>
-              <a:t>share prints 61. Of the Rs 1.9 crore paid, Rs 1.16 crore went to driver-weeks where fewer than half of the requests received were accepted.</a:t>
+              <a:t>share prints 61. Of the Rs 1.9 crore paid, Rs 1.16 crore went to driver-weeks where fewer than half of the offers the driver saw were accepted.</a:t>
             </a:r>
           </a:p>
         </p:txBody>
@@ -17870,7 +17860,7 @@
       </p:sp>
       <p:pic>
         <p:nvPicPr>
-          <p:cNvPr id="9" name="mermaid diagram" descr="c0534eda0c0b9300.png"/>
+          <p:cNvPr id="9" name="mermaid diagram" descr="45507095962718bb.png"/>
           <p:cNvPicPr>
             <a:picLocks noChangeAspect="1"/>
           </p:cNvPicPr>
@@ -17884,8 +17874,8 @@
         </p:blipFill>
         <p:spPr>
           <a:xfrm>
-            <a:off x="2152497" y="1956816"/>
-            <a:ext cx="7886700" cy="1357312"/>
+            <a:off x="2802578" y="1956816"/>
+            <a:ext cx="6586537" cy="871537"/>
           </a:xfrm>
           <a:prstGeom prst="rect">
             <a:avLst/>
@@ -17900,8 +17890,8 @@
         </p:nvSpPr>
         <p:spPr>
           <a:xfrm>
-            <a:off x="530352" y="3460432"/>
-            <a:ext cx="11130991" cy="807720"/>
+            <a:off x="530352" y="2974657"/>
+            <a:ext cx="11130991" cy="1074420"/>
           </a:xfrm>
           <a:prstGeom prst="roundRect">
             <a:avLst>
@@ -17948,8 +17938,8 @@
         </p:nvSpPr>
         <p:spPr>
           <a:xfrm>
-            <a:off x="676656" y="3588448"/>
-            <a:ext cx="45720" cy="551688"/>
+            <a:off x="676656" y="3102673"/>
+            <a:ext cx="45720" cy="818388"/>
           </a:xfrm>
           <a:prstGeom prst="roundRect">
             <a:avLst>
@@ -17994,8 +17984,8 @@
         </p:nvSpPr>
         <p:spPr>
           <a:xfrm>
-            <a:off x="877824" y="3579304"/>
-            <a:ext cx="10564063" cy="624840"/>
+            <a:off x="877824" y="3093529"/>
+            <a:ext cx="10564063" cy="891540"/>
           </a:xfrm>
           <a:prstGeom prst="rect">
             <a:avLst/>
@@ -18042,7 +18032,7 @@
                 </a:solidFill>
                 <a:latin typeface="Calibri"/>
               </a:rPr>
-              <a:t> Pay for completed peak trips with an acceptance guardrail. Rs 1.9 crore spent would have been Rs 74 lakh under the fix.</a:t>
+              <a:t> Pay for completed peak trips with an acceptance guardrail. Rs 1.9 crore spent would have been Rs 74 lakh under the fix if every driver had behaved the same, which a new rule changes.</a:t>
             </a:r>
           </a:p>
         </p:txBody>
@@ -18562,7 +18552,7 @@
       </p:sp>
       <p:pic>
         <p:nvPicPr>
-          <p:cNvPr id="9" name="mermaid diagram" descr="1320df7d845ec625.png"/>
+          <p:cNvPr id="9" name="mermaid diagram" descr="295f9183e696e5cd.png"/>
           <p:cNvPicPr>
             <a:picLocks noChangeAspect="1"/>
           </p:cNvPicPr>
@@ -18576,8 +18566,8 @@
         </p:blipFill>
         <p:spPr>
           <a:xfrm>
-            <a:off x="530352" y="1821033"/>
-            <a:ext cx="4786326" cy="4240060"/>
+            <a:off x="1976459" y="1664208"/>
+            <a:ext cx="8238775" cy="3532632"/>
           </a:xfrm>
           <a:prstGeom prst="rect">
             <a:avLst/>
@@ -18592,8 +18582,8 @@
         </p:nvSpPr>
         <p:spPr>
           <a:xfrm>
-            <a:off x="5761917" y="1956816"/>
-            <a:ext cx="5899425" cy="1601216"/>
+            <a:off x="530352" y="5242560"/>
+            <a:ext cx="11130991" cy="957072"/>
           </a:xfrm>
           <a:prstGeom prst="rect">
             <a:avLst/>
@@ -18606,11 +18596,6 @@
           </a:bodyPr>
           <a:lstStyle/>
           <a:p>
-            <a:pPr>
-              <a:spcAft>
-                <a:spcPts val="800"/>
-              </a:spcAft>
-            </a:pPr>
             <a:r>
               <a:rPr sz="1600" b="1" i="0">
                 <a:solidFill>
@@ -22095,7 +22080,7 @@
                 </a:solidFill>
                 <a:latin typeface="Calibri"/>
               </a:rPr>
-              <a:t> 180 drivers of 1,200 whose hours doubled while their trips fell 12 percent, 70 percent of their new hours in outer zones.</a:t>
+              <a:t> 180 drivers of 1,200 whose hours doubled while their trips fell 12 percent, 72 percent of their new hours in outer zones.</a:t>
             </a:r>
           </a:p>
         </p:txBody>
@@ -24803,7 +24788,7 @@
       </p:sp>
       <p:pic>
         <p:nvPicPr>
-          <p:cNvPr id="9" name="mermaid diagram" descr="425039dd14139d5a.png"/>
+          <p:cNvPr id="9" name="mermaid diagram" descr="47b218c7f9d464a2.png"/>
           <p:cNvPicPr>
             <a:picLocks noChangeAspect="1"/>
           </p:cNvPicPr>
@@ -24817,8 +24802,8 @@
         </p:blipFill>
         <p:spPr>
           <a:xfrm>
-            <a:off x="530352" y="1956816"/>
-            <a:ext cx="11130991" cy="759828"/>
+            <a:off x="1723872" y="1956816"/>
+            <a:ext cx="8743950" cy="871537"/>
           </a:xfrm>
           <a:prstGeom prst="rect">
             <a:avLst/>
@@ -27862,7 +27847,7 @@
       </p:sp>
       <p:pic>
         <p:nvPicPr>
-          <p:cNvPr id="9" name="mermaid diagram" descr="1a4f5aadebcee23a.png"/>
+          <p:cNvPr id="9" name="mermaid diagram" descr="3ca3b5befe279d3a.png"/>
           <p:cNvPicPr>
             <a:picLocks noChangeAspect="1"/>
           </p:cNvPicPr>
@@ -27877,7 +27862,7 @@
         <p:spPr>
           <a:xfrm>
             <a:off x="530352" y="1956816"/>
-            <a:ext cx="11130991" cy="1748136"/>
+            <a:ext cx="11130991" cy="1051747"/>
           </a:xfrm>
           <a:prstGeom prst="rect">
             <a:avLst/>
@@ -27892,7 +27877,7 @@
         </p:nvSpPr>
         <p:spPr>
           <a:xfrm>
-            <a:off x="530352" y="3851256"/>
+            <a:off x="530352" y="3154867"/>
             <a:ext cx="11130991" cy="1048512"/>
           </a:xfrm>
           <a:prstGeom prst="rect">
@@ -30091,7 +30076,7 @@
       </p:sp>
       <p:pic>
         <p:nvPicPr>
-          <p:cNvPr id="9" name="mermaid diagram" descr="97e7a2f04f752821.png"/>
+          <p:cNvPr id="9" name="mermaid diagram" descr="799e76a4b64cd682.png"/>
           <p:cNvPicPr>
             <a:picLocks noChangeAspect="1"/>
           </p:cNvPicPr>
@@ -30105,8 +30090,8 @@
         </p:blipFill>
         <p:spPr>
           <a:xfrm>
-            <a:off x="2309660" y="1848358"/>
-            <a:ext cx="7572375" cy="3543300"/>
+            <a:off x="2266797" y="1956816"/>
+            <a:ext cx="7658100" cy="2300287"/>
           </a:xfrm>
           <a:prstGeom prst="rect">
             <a:avLst/>
@@ -30121,7 +30106,7 @@
         </p:nvSpPr>
         <p:spPr>
           <a:xfrm>
-            <a:off x="530352" y="5537962"/>
+            <a:off x="530352" y="4403407"/>
             <a:ext cx="11130991" cy="495807"/>
           </a:xfrm>
           <a:prstGeom prst="rect">

--- a/content/W04/D1/slides/C2_W04_D01_half1_STUDENT.pptx
+++ b/content/W04/D1/slides/C2_W04_D01_half1_STUDENT.pptx
@@ -1361,7 +1361,12 @@
           </a:p>
           <a:p>
             <a:r>
-              <a:t>will show. Then show this full picture and read the two ranges.</a:t>
+              <a:t>will show. Then show this full picture and read the two ranges. Explorer scene M1 draws the same</a:t>
+            </a:r>
+          </a:p>
+          <a:p>
+            <a:r>
+              <a:t>drift with drivers as dots; use it here if it is on the projector.</a:t>
             </a:r>
           </a:p>
           <a:p>
@@ -3586,7 +3591,7 @@
           <a:lstStyle/>
           <a:p>
             <a:r>
-              <a:t>LIVE, 12 minutes, the war game's round 1 (run sheet: trainer/C2_W04_D01_war_game_TRAINER.md).</a:t>
+              <a:t>LIVE, 8 minutes, the war game's round 1 (run sheet: trainer/C2_W04_D01_war_game_TRAINER.md).</a:t>
             </a:r>
           </a:p>
           <a:p>
@@ -3596,7 +3601,7 @@
           </a:p>
           <a:p>
             <a:r>
-              <a:t>four minutes to give one way to game each number, from instinct only, and its scorer holds the</a:t>
+              <a:t>three minutes to give one way to game each number, from instinct only, and its scorer holds the</a:t>
             </a:r>
           </a:p>
           <a:p>

--- a/content/W04/D1/slides/C2_W04_D01_half1_STUDENT.pptx
+++ b/content/W04/D1/slides/C2_W04_D01_half1_STUDENT.pptx
@@ -2726,7 +2726,12 @@
           </a:p>
           <a:p>
             <a:r>
-              <a:t>will ask it: a saving that assumes nobody changes is a floor on the cost, never a forecast. Round 3</a:t>
+              <a:t>will ask it: a saving that assumes nobody changes is the most the redesign could save, and an honest</a:t>
+            </a:r>
+          </a:p>
+          <a:p>
+            <a:r>
+              <a:t>saving says how drivers respond. Round 3</a:t>
             </a:r>
           </a:p>
           <a:p>
@@ -3261,17 +3266,17 @@
           </a:p>
           <a:p>
             <a:r>
-              <a:t>without them), seasonality (the busiest weeks: 1.60; last year's weeks are not in the data, so the</a:t>
-            </a:r>
-          </a:p>
-          <a:p>
-            <a:r>
-              <a:t>caveat narrows and stays partly open), interference (needs hourly data and the other app), selection</a:t>
-            </a:r>
-          </a:p>
-          <a:p>
-            <a:r>
-              <a:t>(needs the city's full driver list), cause (the tentative faculty block designs the test).</a:t>
+              <a:t>without them), seasonality (the three weeks with most requests: 1.60; last year's weeks are not in the data, so the</a:t>
+            </a:r>
+          </a:p>
+          <a:p>
+            <a:r>
+              <a:t>caveat narrows and stays partly open), drivers on two apps (needs hourly data and the other app), who chose to</a:t>
+            </a:r>
+          </a:p>
+          <a:p>
+            <a:r>
+              <a:t>enrol (needs the city's full driver list), cause (the tentative faculty block designs the test).</a:t>
             </a:r>
           </a:p>
           <a:p>
@@ -3981,7 +3986,7 @@
           </a:p>
           <a:p>
             <a:r>
-              <a:t>Transition: six real drivers from the case data.</a:t>
+              <a:t>Transition: six drivers from the case's own data.</a:t>
             </a:r>
           </a:p>
         </p:txBody>
@@ -7218,8 +7223,8 @@
         </p:nvSpPr>
         <p:spPr>
           <a:xfrm>
-            <a:off x="530352" y="1807718"/>
-            <a:ext cx="11130991" cy="629920"/>
+            <a:off x="530352" y="1682496"/>
+            <a:ext cx="5291175" cy="1163320"/>
           </a:xfrm>
           <a:prstGeom prst="roundRect">
             <a:avLst>
@@ -7266,8 +7271,8 @@
         </p:nvSpPr>
         <p:spPr>
           <a:xfrm>
-            <a:off x="676656" y="1935734"/>
-            <a:ext cx="45720" cy="373888"/>
+            <a:off x="676656" y="1810512"/>
+            <a:ext cx="45720" cy="907287"/>
           </a:xfrm>
           <a:prstGeom prst="roundRect">
             <a:avLst>
@@ -7312,8 +7317,8 @@
         </p:nvSpPr>
         <p:spPr>
           <a:xfrm>
-            <a:off x="877824" y="1926590"/>
-            <a:ext cx="10564063" cy="447040"/>
+            <a:off x="877824" y="1801368"/>
+            <a:ext cx="4724247" cy="980440"/>
           </a:xfrm>
           <a:prstGeom prst="rect">
             <a:avLst/>
@@ -7342,7 +7347,7 @@
                 </a:solidFill>
                 <a:latin typeface="Calibri"/>
               </a:rPr>
-              <a:t>From Monday 31 August 2026 an enrolled driver online through a whole peak window (two a day, three hours each) is guaranteed Rs 300 per peak online hour, and Uber tops up the gap. The goal: riders picked up faster.</a:t>
+              <a:t>From Monday 31 August 2026 an enrolled driver (one signed up for the scheme) online through a whole peak window (two a day, three hours each) is guaranteed Rs 300 per peak online hour: Uber tops up the gap between the driver's trip earnings and that floor. The goal: riders picked up faster.</a:t>
             </a:r>
           </a:p>
         </p:txBody>
@@ -7356,8 +7361,8 @@
           <p:nvPr/>
         </p:nvGraphicFramePr>
         <p:xfrm>
-          <a:off x="530352" y="2602230"/>
-          <a:ext cx="11130990" cy="1865376"/>
+          <a:off x="530352" y="3010408"/>
+          <a:ext cx="5291174" cy="2505456"/>
         </p:xfrm>
         <a:graphic>
           <a:graphicData uri="http://schemas.openxmlformats.org/drawingml/2006/table">
@@ -7366,11 +7371,11 @@
                 <a:tableStyleId>{2D5ABB26-0587-4C30-8999-92F81FD0307C}</a:tableStyleId>
               </a:tblPr>
               <a:tblGrid>
-                <a:gridCol w="5583081"/>
-                <a:gridCol w="2056933"/>
-                <a:gridCol w="3490976"/>
+                <a:gridCol w="2296141"/>
+                <a:gridCol w="1110433"/>
+                <a:gridCol w="1884600"/>
               </a:tblGrid>
-              <a:tr h="310896">
+              <a:tr h="438912">
                 <a:tc>
                   <a:txBody>
                     <a:bodyPr/>
@@ -7438,7 +7443,7 @@
                   </a:tcPr>
                 </a:tc>
               </a:tr>
-              <a:tr h="310896">
+              <a:tr h="438912">
                 <a:tc>
                   <a:txBody>
                     <a:bodyPr/>
@@ -7574,7 +7579,7 @@
                   </a:tcPr>
                 </a:tc>
               </a:tr>
-              <a:tr h="310896">
+              <a:tr h="438912">
                 <a:tc>
                   <a:txBody>
                     <a:bodyPr/>
@@ -7587,7 +7592,7 @@
                           </a:solidFill>
                           <a:latin typeface="Calibri"/>
                         </a:rPr>
-                        <a:t>Offers accepted; accepted, then cancelled by the driver</a:t>
+                        <a:t>Share of offers accepted; share of accepted trips the driver cancelled</a:t>
                       </a:r>
                     </a:p>
                   </a:txBody>
@@ -7642,7 +7647,7 @@
                   </a:tcPr>
                 </a:tc>
               </a:tr>
-              <a:tr h="310896">
+              <a:tr h="438912">
                 <a:tc>
                   <a:txBody>
                     <a:bodyPr/>
@@ -7655,7 +7660,7 @@
                           </a:solidFill>
                           <a:latin typeface="Calibri"/>
                         </a:rPr>
-                        <a:t>Online hours with no trip; median rider wait</a:t>
+                        <a:t>Share of online hours with no trip; median rider wait</a:t>
                       </a:r>
                     </a:p>
                   </a:txBody>
@@ -7710,7 +7715,7 @@
                   </a:tcPr>
                 </a:tc>
               </a:tr>
-              <a:tr h="310896">
+              <a:tr h="438912">
                 <a:tc>
                   <a:txBody>
                     <a:bodyPr/>
@@ -7723,7 +7728,7 @@
                           </a:solidFill>
                           <a:latin typeface="Calibri"/>
                         </a:rPr>
-                        <a:t>Rider requests unfulfilled; top-up paid</a:t>
+                        <a:t>Share of rider requests unfulfilled; top-up paid</a:t>
                       </a:r>
                     </a:p>
                   </a:txBody>
@@ -7790,8 +7795,8 @@
         </p:nvSpPr>
         <p:spPr>
           <a:xfrm>
-            <a:off x="530352" y="4723638"/>
-            <a:ext cx="11130991" cy="807720"/>
+            <a:off x="6370167" y="1682496"/>
+            <a:ext cx="5291175" cy="2052320"/>
           </a:xfrm>
           <a:prstGeom prst="roundRect">
             <a:avLst>
@@ -7838,8 +7843,8 @@
         </p:nvSpPr>
         <p:spPr>
           <a:xfrm>
-            <a:off x="676656" y="4851654"/>
-            <a:ext cx="45720" cy="551688"/>
+            <a:off x="6516471" y="1810512"/>
+            <a:ext cx="45720" cy="1796288"/>
           </a:xfrm>
           <a:prstGeom prst="roundRect">
             <a:avLst>
@@ -7884,8 +7889,8 @@
         </p:nvSpPr>
         <p:spPr>
           <a:xfrm>
-            <a:off x="877824" y="4842510"/>
-            <a:ext cx="10564063" cy="624840"/>
+            <a:off x="6717639" y="1801368"/>
+            <a:ext cx="4724247" cy="1869439"/>
           </a:xfrm>
           <a:prstGeom prst="rect">
             <a:avLst/>
@@ -7914,7 +7919,7 @@
                 </a:solidFill>
                 <a:latin typeface="Calibri"/>
               </a:rPr>
-              <a:t>drivers (1,200, 140 new), driver_weeks (hours, offers, accepted, cancels, trips, hours with no trip, bookings, top-up; a declined request is offered again, so it counts offers), zone_weeks (rider requests, fulfilled, median wait). </a:t>
+              <a:t>drivers (1,200; 140 joined after the launch), driver_weeks (one row per driver per week: hours, offers, accepted, cancels, trips, hours with no trip, bookings as fares riders paid, top-up; a declined request is offered again, so it counts offers), zone_weeks (rider requests, fulfilled, median wait). </a:t>
             </a:r>
             <a:r>
               <a:rPr sz="1000" b="1" i="0">
@@ -7932,7 +7937,7 @@
                 </a:solidFill>
                 <a:latin typeface="Calibri"/>
               </a:rPr>
-              <a:t> is it working, what should it pay for, is anyone gaming it? </a:t>
+              <a:t> is it working, what should it pay for, is anyone gaming it, raising the number without doing what it stands for? </a:t>
             </a:r>
             <a:r>
               <a:rPr sz="1000" b="1" i="0">
@@ -7950,7 +7955,7 @@
                 </a:solidFill>
                 <a:latin typeface="Calibri"/>
               </a:rPr>
-              <a:t> the monsoon ended mid-window; 140 drivers are new; online means the app is open; three outer zones are thin; drivers can be on two apps.</a:t>
+              <a:t> the monsoon ended mid-window; 140 drivers are new; online means the app is open; three outer zones (Shamshabad, Rajendranagar, Patancheru) get few requests; drivers can be on two apps; trip earnings are not in the data.</a:t>
             </a:r>
           </a:p>
         </p:txBody>
@@ -7963,8 +7968,8 @@
         </p:nvSpPr>
         <p:spPr>
           <a:xfrm>
-            <a:off x="530352" y="5695950"/>
-            <a:ext cx="45720" cy="378460"/>
+            <a:off x="6370167" y="3899407"/>
+            <a:ext cx="45720" cy="574040"/>
           </a:xfrm>
           <a:prstGeom prst="roundRect">
             <a:avLst>
@@ -8009,8 +8014,8 @@
         </p:nvSpPr>
         <p:spPr>
           <a:xfrm>
-            <a:off x="786384" y="5695950"/>
-            <a:ext cx="10820095" cy="378460"/>
+            <a:off x="6626199" y="3899407"/>
+            <a:ext cx="4980279" cy="574040"/>
           </a:xfrm>
           <a:prstGeom prst="rect">
             <a:avLst/>
@@ -9395,7 +9400,7 @@
                 </a:solidFill>
                 <a:latin typeface="Calibri"/>
               </a:rPr>
-              <a:t>The before week begins 10 August 2026 and the after week 21 September 2026. These are twelve real rows of driver_weeks.</a:t>
+              <a:t>The before week begins 10 August 2026 and the after week 21 September 2026. These are twelve rows of the case's own driver_weeks; E and F drive in two of the three outer zones, where riders are few.</a:t>
             </a:r>
           </a:p>
         </p:txBody>
@@ -11195,7 +11200,7 @@
         </p:nvSpPr>
         <p:spPr>
           <a:xfrm>
-            <a:off x="530352" y="1956816"/>
+            <a:off x="530352" y="1820672"/>
             <a:ext cx="11130991" cy="1601216"/>
           </a:xfrm>
           <a:prstGeom prst="rect">
@@ -11230,7 +11235,7 @@
                 </a:solidFill>
                 <a:latin typeface="Calibri"/>
               </a:rPr>
-              <a:t> was the number of accounts and products per retail bank household. It had no usage condition: an unused debit card, the largest product in it, could stay in the count for up to four years. Staff opened accounts customers had not asked for, moved customers' money into new accounts to meet funding rules ("simulated funding"), and changed contact details so customers would miss satisfaction surveys.</a:t>
+              <a:t> was the number of accounts and products per retail bank household. It had no usage condition: an unused debit card, the largest product in it, could stay in the count for up to four years. Staff opened accounts customers had not asked for, moved customers' money into new accounts so the accounts would count as funded ("simulated funding"), and changed contact details so customers would not receive satisfaction surveys.</a:t>
             </a:r>
           </a:p>
         </p:txBody>
@@ -11243,7 +11248,7 @@
         </p:nvSpPr>
         <p:spPr>
           <a:xfrm>
-            <a:off x="530352" y="3686048"/>
+            <a:off x="530352" y="3549904"/>
             <a:ext cx="3527450" cy="698500"/>
           </a:xfrm>
           <a:prstGeom prst="rect">
@@ -11278,7 +11283,7 @@
         </p:nvSpPr>
         <p:spPr>
           <a:xfrm>
-            <a:off x="530352" y="4421124"/>
+            <a:off x="530352" y="4284980"/>
             <a:ext cx="3527450" cy="168656"/>
           </a:xfrm>
           <a:prstGeom prst="rect">
@@ -11313,7 +11318,7 @@
         </p:nvSpPr>
         <p:spPr>
           <a:xfrm>
-            <a:off x="530352" y="4622292"/>
+            <a:off x="530352" y="4486148"/>
             <a:ext cx="3527450" cy="350266"/>
           </a:xfrm>
           <a:prstGeom prst="rect">
@@ -11348,7 +11353,7 @@
         </p:nvSpPr>
         <p:spPr>
           <a:xfrm>
-            <a:off x="530352" y="4874768"/>
+            <a:off x="530352" y="4738624"/>
             <a:ext cx="3527450" cy="10972"/>
           </a:xfrm>
           <a:prstGeom prst="rect">
@@ -11392,7 +11397,7 @@
         </p:nvSpPr>
         <p:spPr>
           <a:xfrm>
-            <a:off x="4332122" y="3686048"/>
+            <a:off x="4332122" y="3549904"/>
             <a:ext cx="3527450" cy="698500"/>
           </a:xfrm>
           <a:prstGeom prst="rect">
@@ -11427,7 +11432,7 @@
         </p:nvSpPr>
         <p:spPr>
           <a:xfrm>
-            <a:off x="4332122" y="4421124"/>
+            <a:off x="4332122" y="4284980"/>
             <a:ext cx="3527450" cy="168656"/>
           </a:xfrm>
           <a:prstGeom prst="rect">
@@ -11462,7 +11467,7 @@
         </p:nvSpPr>
         <p:spPr>
           <a:xfrm>
-            <a:off x="4332122" y="4622292"/>
+            <a:off x="4332122" y="4486148"/>
             <a:ext cx="3527450" cy="193421"/>
           </a:xfrm>
           <a:prstGeom prst="rect">
@@ -11497,7 +11502,7 @@
         </p:nvSpPr>
         <p:spPr>
           <a:xfrm>
-            <a:off x="4332122" y="4874768"/>
+            <a:off x="4332122" y="4738624"/>
             <a:ext cx="3527450" cy="10972"/>
           </a:xfrm>
           <a:prstGeom prst="rect">
@@ -11541,7 +11546,7 @@
         </p:nvSpPr>
         <p:spPr>
           <a:xfrm>
-            <a:off x="8133892" y="3686048"/>
+            <a:off x="8133892" y="3549904"/>
             <a:ext cx="3527450" cy="698500"/>
           </a:xfrm>
           <a:prstGeom prst="rect">
@@ -11576,7 +11581,7 @@
         </p:nvSpPr>
         <p:spPr>
           <a:xfrm>
-            <a:off x="8133892" y="4421124"/>
+            <a:off x="8133892" y="4284980"/>
             <a:ext cx="3527450" cy="168656"/>
           </a:xfrm>
           <a:prstGeom prst="rect">
@@ -11611,7 +11616,7 @@
         </p:nvSpPr>
         <p:spPr>
           <a:xfrm>
-            <a:off x="8133892" y="4622292"/>
+            <a:off x="8133892" y="4486148"/>
             <a:ext cx="3527450" cy="193421"/>
           </a:xfrm>
           <a:prstGeom prst="rect">
@@ -11646,7 +11651,7 @@
         </p:nvSpPr>
         <p:spPr>
           <a:xfrm>
-            <a:off x="8133892" y="4874768"/>
+            <a:off x="8133892" y="4738624"/>
             <a:ext cx="3527450" cy="10972"/>
           </a:xfrm>
           <a:prstGeom prst="rect">
@@ -11690,8 +11695,8 @@
         </p:nvSpPr>
         <p:spPr>
           <a:xfrm>
-            <a:off x="530352" y="5149088"/>
-            <a:ext cx="11130991" cy="772160"/>
+            <a:off x="530352" y="5012944"/>
+            <a:ext cx="11130991" cy="1048512"/>
           </a:xfrm>
           <a:prstGeom prst="rect">
             <a:avLst/>
@@ -11716,7 +11721,7 @@
                 </a:solidFill>
                 <a:latin typeface="Calibri"/>
               </a:rPr>
-              <a:t>Sources: the CFPB release of 8 September 2016, the SEC release of 21 February 2020 and the SEC order, Release 34-88257, each checked 12 October 2026.</a:t>
+              <a:t>Sources: the release of the US Consumer Financial Protection Bureau (CFPB) of 8 September 2016, the release of the US Securities and Exchange Commission (SEC) of 21 February 2020 and the SEC order, Release 34-88257, each checked 12 October 2026.</a:t>
             </a:r>
           </a:p>
         </p:txBody>
@@ -12236,7 +12241,7 @@
       </p:sp>
       <p:pic>
         <p:nvPicPr>
-          <p:cNvPr id="9" name="mermaid diagram" descr="dd9d2bb20f33968f.png"/>
+          <p:cNvPr id="9" name="mermaid diagram" descr="d772db5e20b1a9dd.png"/>
           <p:cNvPicPr>
             <a:picLocks noChangeAspect="1"/>
           </p:cNvPicPr>
@@ -12250,8 +12255,8 @@
         </p:blipFill>
         <p:spPr>
           <a:xfrm>
-            <a:off x="530352" y="2782110"/>
-            <a:ext cx="4786326" cy="2317906"/>
+            <a:off x="530352" y="2727681"/>
+            <a:ext cx="4786326" cy="2426764"/>
           </a:xfrm>
           <a:prstGeom prst="rect">
             <a:avLst/>
@@ -13516,7 +13521,7 @@
                 </a:solidFill>
                 <a:latin typeface="Georgia"/>
               </a:rPr>
-              <a:t>Which column would show the fall is demand?</a:t>
+              <a:t>Which column would show riders asked for less?</a:t>
             </a:r>
           </a:p>
         </p:txBody>
@@ -15159,8 +15164,8 @@
         </p:blipFill>
         <p:spPr>
           <a:xfrm>
-            <a:off x="2603855" y="1664208"/>
-            <a:ext cx="6983984" cy="3491992"/>
+            <a:off x="2880207" y="1664208"/>
+            <a:ext cx="6431280" cy="3215640"/>
           </a:xfrm>
           <a:prstGeom prst="rect">
             <a:avLst/>
@@ -15175,7 +15180,7 @@
         </p:nvSpPr>
         <p:spPr>
           <a:xfrm>
-            <a:off x="530352" y="5192776"/>
+            <a:off x="530352" y="4916424"/>
             <a:ext cx="11130991" cy="316992"/>
           </a:xfrm>
           <a:prstGeom prst="rect">
@@ -15210,8 +15215,8 @@
         </p:nvSpPr>
         <p:spPr>
           <a:xfrm>
-            <a:off x="530352" y="5518912"/>
-            <a:ext cx="11130991" cy="680720"/>
+            <a:off x="530352" y="5242560"/>
+            <a:ext cx="11130991" cy="957072"/>
           </a:xfrm>
           <a:prstGeom prst="rect">
             <a:avLst/>
@@ -15231,7 +15236,7 @@
                 </a:solidFill>
                 <a:latin typeface="Calibri"/>
               </a:rPr>
-              <a:t>Before the launch, trips per hour wandered between 1.88 and 1.93. In the launch week it read 1.64, then held between 1.55 and 1.59 for five weeks, while hours rose from about 20,000 a week to about 24,000.</a:t>
+              <a:t>Before the launch, trips per hour wandered between 1.88 and 1.93. In the launch week it read 1.64, then held between 1.55 and 1.59 for five weeks, while hours rose from about 20,000 a week to about 24,000. The two lines use two different scales, so the point where they cross means nothing.</a:t>
             </a:r>
           </a:p>
         </p:txBody>
@@ -15744,7 +15749,7 @@
                 </a:solidFill>
                 <a:latin typeface="Calibri"/>
               </a:rPr>
-              <a:t>What is the smallest code that turns 12,860 driver-weeks into the ticket's numbers?</a:t>
+              <a:t>What is the smallest code that turns 12,860 driver-weeks, one row for every driver on the app each week, into the ticket's numbers?</a:t>
             </a:r>
           </a:p>
         </p:txBody>
@@ -16445,7 +16450,7 @@
         <p:spPr>
           <a:xfrm>
             <a:off x="530352" y="4597908"/>
-            <a:ext cx="11130991" cy="495807"/>
+            <a:ext cx="11130991" cy="1048512"/>
           </a:xfrm>
           <a:prstGeom prst="rect">
             <a:avLst/>
@@ -16470,7 +16475,7 @@
                 </a:solidFill>
                 <a:latin typeface="Calibri"/>
               </a:rPr>
-              <a:t>The rate is a ratio of two sums: every trip over every hour.</a:t>
+              <a:t>The rate is a ratio of two sums: every trip over every hour. .lt(...) asks whether a week starts before the launch, and .map turns True and False into before and after; the notebook adds the two shares the same way, sum first, then divide.</a:t>
             </a:r>
           </a:p>
         </p:txBody>
@@ -18127,7 +18132,7 @@
       </p:sp>
       <p:pic>
         <p:nvPicPr>
-          <p:cNvPr id="9" name="mermaid diagram" descr="c1c41b08b7afe0af.png"/>
+          <p:cNvPr id="9" name="mermaid diagram" descr="49f41a108752e8e1.png"/>
           <p:cNvPicPr>
             <a:picLocks noChangeAspect="1"/>
           </p:cNvPicPr>
@@ -18141,8 +18146,8 @@
         </p:blipFill>
         <p:spPr>
           <a:xfrm>
-            <a:off x="3432973" y="1664208"/>
-            <a:ext cx="5325748" cy="2295144"/>
+            <a:off x="3560514" y="1664208"/>
+            <a:ext cx="5070666" cy="2295144"/>
           </a:xfrm>
           <a:prstGeom prst="rect">
             <a:avLst/>
@@ -18158,7 +18163,7 @@
         <p:spPr>
           <a:xfrm>
             <a:off x="530352" y="4005072"/>
-            <a:ext cx="11130991" cy="1074420"/>
+            <a:ext cx="11130991" cy="1341120"/>
           </a:xfrm>
           <a:prstGeom prst="roundRect">
             <a:avLst>
@@ -18206,7 +18211,7 @@
         <p:spPr>
           <a:xfrm>
             <a:off x="676656" y="4133088"/>
-            <a:ext cx="45720" cy="818388"/>
+            <a:ext cx="45720" cy="1085088"/>
           </a:xfrm>
           <a:prstGeom prst="roundRect">
             <a:avLst>
@@ -18252,7 +18257,7 @@
         <p:spPr>
           <a:xfrm>
             <a:off x="877824" y="4123944"/>
-            <a:ext cx="10564063" cy="891540"/>
+            <a:ext cx="10564063" cy="1158240"/>
           </a:xfrm>
           <a:prstGeom prst="rect">
             <a:avLst/>
@@ -18281,7 +18286,7 @@
                 </a:solidFill>
                 <a:latin typeface="Calibri"/>
               </a:rPr>
-              <a:t>The average of rates prints 1.71 after the launch, against 1.58 from the sums, so it hides two-fifths of the fall (0.19 of 0.32). It gives a 10-hour driver-week the same weight as a 42-hour one, and the drivers who sat online longest are the ones whose rate fell most.</a:t>
+              <a:t>The average of rates prints 1.71 after the launch, against 1.58 from the sums. The true fall is 0.32, from 1.90 to 1.58; the average shows 0.19 of it and hides 0.13, about two-fifths. It gives a 42-hour week the same weight as a 10-hour one, so the long, slow weeks of the drivers online longest count no more than anyone's short, busy ones.</a:t>
             </a:r>
           </a:p>
         </p:txBody>
@@ -18294,8 +18299,8 @@
         </p:nvSpPr>
         <p:spPr>
           <a:xfrm>
-            <a:off x="530352" y="5244084"/>
-            <a:ext cx="11130991" cy="1048512"/>
+            <a:off x="530352" y="5510784"/>
+            <a:ext cx="11130991" cy="1324864"/>
           </a:xfrm>
           <a:prstGeom prst="rect">
             <a:avLst/>
@@ -18320,7 +18325,7 @@
                 </a:solidFill>
                 <a:latin typeface="Calibri"/>
               </a:rPr>
-              <a:t>The two drivers are invented. </a:t>
+              <a:t>The drivers are invented: Y's 40 slow hours count as one week, like X's 10, so the average reads 1.25 against a true 0.80, too high, as the city's 1.71 is. </a:t>
             </a:r>
             <a:r>
               <a:rPr sz="1600" b="1" i="0">
@@ -18338,7 +18343,7 @@
                 </a:solidFill>
                 <a:latin typeface="Calibri"/>
               </a:rPr>
-              <a:t> a fall that looks a third smaller reads as noise, and the scheme is extended. </a:t>
+              <a:t> a fall two-fifths smaller reads as noise, and the scheme is extended. </a:t>
             </a:r>
             <a:r>
               <a:rPr sz="1600" b="1" i="0">
@@ -18374,7 +18379,7 @@
                 </a:solidFill>
                 <a:latin typeface="Calibri"/>
               </a:rPr>
-              <a:t> trips per peak online hour as a ratio of sums, the denominator named.</a:t>
+              <a:t> a ratio of sums, its denominator named.</a:t>
             </a:r>
           </a:p>
         </p:txBody>
@@ -18902,7 +18907,7 @@
         </p:nvGraphicFramePr>
         <p:xfrm>
           <a:off x="530352" y="1956816"/>
-          <a:ext cx="11130989" cy="1627632"/>
+          <a:ext cx="11130990" cy="1420368"/>
         </p:xfrm>
         <a:graphic>
           <a:graphicData uri="http://schemas.openxmlformats.org/drawingml/2006/table">
@@ -18911,12 +18916,12 @@
                 <a:tableStyleId>{2D5ABB26-0587-4C30-8999-92F81FD0307C}</a:tableStyleId>
               </a:tblPr>
               <a:tblGrid>
-                <a:gridCol w="2669877"/>
-                <a:gridCol w="4509250"/>
-                <a:gridCol w="1537582"/>
-                <a:gridCol w="2414280"/>
+                <a:gridCol w="2689641"/>
+                <a:gridCol w="4542629"/>
+                <a:gridCol w="1466568"/>
+                <a:gridCol w="2432152"/>
               </a:tblGrid>
-              <a:tr h="542544">
+              <a:tr h="335280">
                 <a:tc>
                   <a:txBody>
                     <a:bodyPr/>
@@ -18951,7 +18956,7 @@
                           </a:solidFill>
                           <a:latin typeface="Calibri"/>
                         </a:rPr>
-                        <a:t>Numerator</a:t>
+                        <a:t>What is counted</a:t>
                       </a:r>
                     </a:p>
                   </a:txBody>
@@ -18973,7 +18978,7 @@
                           </a:solidFill>
                           <a:latin typeface="Calibri"/>
                         </a:rPr>
-                        <a:t>Denominator or unit</a:t>
+                        <a:t>Per what</a:t>
                       </a:r>
                     </a:p>
                   </a:txBody>
@@ -19198,7 +19203,7 @@
         </p:nvSpPr>
         <p:spPr>
           <a:xfrm>
-            <a:off x="530352" y="3840480"/>
+            <a:off x="530352" y="3633216"/>
             <a:ext cx="11130991" cy="1324864"/>
           </a:xfrm>
           <a:prstGeom prst="rect">
@@ -19702,7 +19707,7 @@
                 </a:solidFill>
                 <a:latin typeface="Georgia"/>
               </a:rPr>
-              <a:t>Delhi Metro counted one crowd three ways</a:t>
+              <a:t>Delhi Metro counts its crowd in three units</a:t>
             </a:r>
           </a:p>
         </p:txBody>
@@ -19737,7 +19742,7 @@
                 </a:solidFill>
                 <a:latin typeface="Calibri"/>
               </a:rPr>
-              <a:t>How can one crowd give three numbers, none of them wrong?</a:t>
+              <a:t>How can one network's crowd give three numbers, none of them wrong?</a:t>
             </a:r>
           </a:p>
         </p:txBody>
@@ -20198,7 +20203,7 @@
         <p:spPr>
           <a:xfrm>
             <a:off x="530352" y="3419856"/>
-            <a:ext cx="11130991" cy="1324864"/>
+            <a:ext cx="11130991" cy="1601216"/>
           </a:xfrm>
           <a:prstGeom prst="rect">
             <a:avLst/>
@@ -20223,7 +20228,7 @@
                 </a:solidFill>
                 <a:latin typeface="Calibri"/>
               </a:rPr>
-              <a:t>In 2018 DMRC began counting "line utilisation": a rider from Noida City Centre to HUDA City Centre on three lines counts three, where the gate count counts one (PTI). In 2026 the figures arrive as 64.06 lakh average daily "journeys" (The Tribune) and the record "boardings" above (Republic World); all checked 12 October 2026. A definition can move a number without moving the crowd.</a:t>
+              <a:t>In 2018 the Delhi Metro Rail Corporation (DMRC) began counting "line utilisation": a rider from Noida City Centre to HUDA City Centre who changes across three lines counts three times, where the gate count counts one rider (PTI, the Press Trust of India). In 2026 the figures arrive as 64.06 lakh average daily "journeys" (The Tribune) and a record day of "boardings" (Republic World), each a different unit again; all checked 12 October 2026. A definition can move a number without moving the crowd.</a:t>
             </a:r>
           </a:p>
         </p:txBody>
@@ -21301,7 +21306,7 @@
                 </a:solidFill>
                 <a:latin typeface="Georgia"/>
               </a:rPr>
-              <a:t>Answer: 180 drivers, 15 percent, sat idle online</a:t>
+              <a:t>Answer: 180 drivers, more hours, fewer trips</a:t>
             </a:r>
           </a:p>
         </p:txBody>
@@ -21357,8 +21362,8 @@
         </p:blipFill>
         <p:spPr>
           <a:xfrm>
-            <a:off x="2882747" y="1664208"/>
-            <a:ext cx="6426200" cy="2933700"/>
+            <a:off x="2863274" y="1664208"/>
+            <a:ext cx="6465146" cy="2951480"/>
           </a:xfrm>
           <a:prstGeom prst="rect">
             <a:avLst/>
@@ -21373,7 +21378,7 @@
         </p:nvSpPr>
         <p:spPr>
           <a:xfrm>
-            <a:off x="530352" y="4634484"/>
+            <a:off x="530352" y="4652264"/>
             <a:ext cx="11130991" cy="316992"/>
           </a:xfrm>
           <a:prstGeom prst="rect">
@@ -21408,8 +21413,8 @@
         </p:nvSpPr>
         <p:spPr>
           <a:xfrm>
-            <a:off x="530352" y="4960620"/>
-            <a:ext cx="11130991" cy="1074420"/>
+            <a:off x="530352" y="4978400"/>
+            <a:ext cx="11130991" cy="1056640"/>
           </a:xfrm>
           <a:prstGeom prst="roundRect">
             <a:avLst>
@@ -21456,8 +21461,8 @@
         </p:nvSpPr>
         <p:spPr>
           <a:xfrm>
-            <a:off x="676656" y="5088636"/>
-            <a:ext cx="45720" cy="818388"/>
+            <a:off x="676656" y="5106416"/>
+            <a:ext cx="45720" cy="800608"/>
           </a:xfrm>
           <a:prstGeom prst="roundRect">
             <a:avLst>
@@ -21502,8 +21507,8 @@
         </p:nvSpPr>
         <p:spPr>
           <a:xfrm>
-            <a:off x="877824" y="5079492"/>
-            <a:ext cx="10564063" cy="891540"/>
+            <a:off x="877824" y="5097272"/>
+            <a:ext cx="10564063" cy="873760"/>
           </a:xfrm>
           <a:prstGeom prst="rect">
             <a:avLst/>
@@ -21517,7 +21522,7 @@
           <a:lstStyle/>
           <a:p>
             <a:r>
-              <a:rPr sz="1500" b="1">
+              <a:rPr sz="1100" b="1">
                 <a:solidFill>
                   <a:srgbClr val="5B3FD6"/>
                 </a:solidFill>
@@ -21526,16 +21531,16 @@
               <a:t>Answer: c. </a:t>
             </a:r>
             <a:r>
-              <a:rPr sz="1500" b="0" i="0">
+              <a:rPr sz="1100" b="0" i="0">
                 <a:solidFill>
                   <a:srgbClr val="1A1440"/>
                 </a:solidFill>
                 <a:latin typeface="Calibri"/>
               </a:rPr>
-              <a:t>180 drivers, 15 percent: the </a:t>
-            </a:r>
-            <a:r>
-              <a:rPr sz="1500" b="1" i="0">
+              <a:t>180 drivers, 15 percent of the city: the </a:t>
+            </a:r>
+            <a:r>
+              <a:rPr sz="1100" b="1" i="0">
                 <a:solidFill>
                   <a:srgbClr val="1A1440"/>
                 </a:solidFill>
@@ -21544,13 +21549,13 @@
               <a:t>idle tail</a:t>
             </a:r>
             <a:r>
-              <a:rPr sz="1500" b="0" i="0">
+              <a:rPr sz="1100" b="0" i="0">
                 <a:solidFill>
                   <a:srgbClr val="1A1440"/>
                 </a:solidFill>
                 <a:latin typeface="Calibri"/>
               </a:rPr>
-              <a:t>. Hours 2.1 times, trips down 12 percent, 72 percent of the new hours in the outer zones. The six held two of them, a third of the sample against 15 percent city-wide.</a:t>
+              <a:t>, named for the long online hours in which they completed few trips. Their hours went to 2.1 times their level before the launch while their trips fell 12 percent, and 72 percent of their new hours were in the outer zones. Each dot is one driver-week; E's and F's weeks are the small group at the bottom left, the most extreme of the 180, which is why the six fall further than the city.</a:t>
             </a:r>
           </a:p>
         </p:txBody>
@@ -22070,7 +22075,7 @@
       </p:sp>
       <p:pic>
         <p:nvPicPr>
-          <p:cNvPr id="9" name="mermaid diagram" descr="65b801dab7c3dbec.png"/>
+          <p:cNvPr id="9" name="mermaid diagram" descr="7e0f2cc5b29c7c7d.png"/>
           <p:cNvPicPr>
             <a:picLocks noChangeAspect="1"/>
           </p:cNvPicPr>
@@ -22084,8 +22089,8 @@
         </p:blipFill>
         <p:spPr>
           <a:xfrm>
-            <a:off x="2803402" y="1664208"/>
-            <a:ext cx="6584889" cy="2545080"/>
+            <a:off x="2987822" y="1664208"/>
+            <a:ext cx="6216050" cy="2545080"/>
           </a:xfrm>
           <a:prstGeom prst="rect">
             <a:avLst/>
@@ -23385,7 +23390,7 @@
                 </a:solidFill>
                 <a:latin typeface="Calibri"/>
               </a:rPr>
-              <a:t>If the scheme paid for one number, which would make the most drivers drive?</a:t>
+              <a:t>Which rule would make drivers drive and serve riders, without paying for idling or for picking only easy trips?</a:t>
             </a:r>
           </a:p>
         </p:txBody>
@@ -23456,7 +23461,7 @@
                 </a:solidFill>
                 <a:latin typeface="Calibri"/>
               </a:rPr>
-              <a:t>c) Completed peak trips, with an acceptance floor beside it</a:t>
+              <a:t>c) Completed peak trips, with a minimum share of offers accepted</a:t>
             </a:r>
           </a:p>
           <a:p>
@@ -24122,7 +24127,7 @@
                 </a:solidFill>
                 <a:latin typeface="Calibri"/>
               </a:rPr>
-              <a:t>Hours pay for an open app, which the idle tail showed. Trips alone let a driver accept only short or nearby trips and decline the rest, which the share of offers accepted catches. Enrolled drivers rise with every sign-up whether or not anyone drives. Trips with an acceptance floor pay for the service and catch the cherry-picking.</a:t>
+              <a:t>Hours pay for an open app, which the idle tail showed. Trips alone let a driver accept only short or nearby trips and decline the rest, which the share of offers accepted catches. Enrolled drivers rise with every sign-up whether or not anyone drives. Trips with an acceptance floor, a minimum share of offers accepted, pay for the service and catch the cherry-picking.</a:t>
             </a:r>
           </a:p>
         </p:txBody>
@@ -24648,8 +24653,8 @@
         </p:nvSpPr>
         <p:spPr>
           <a:xfrm>
-            <a:off x="530352" y="1887220"/>
-            <a:ext cx="11130991" cy="772160"/>
+            <a:off x="530352" y="1682496"/>
+            <a:ext cx="11130991" cy="1048512"/>
           </a:xfrm>
           <a:prstGeom prst="rect">
             <a:avLst/>
@@ -24674,7 +24679,7 @@
                 </a:solidFill>
                 <a:latin typeface="Calibri"/>
               </a:rPr>
-              <a:t>By the close of the afternoon's first hour the room writes one sentence with its blanks filled from the data, and a definition of seven lines that three people who lose under it cannot break.</a:t>
+              <a:t>By the close of the afternoon's first hour the room writes one sentence with its blanks filled from the data, and a definition of seven lines that the three city-team roles, who each lose something under it, cannot break.</a:t>
             </a:r>
           </a:p>
         </p:txBody>
@@ -24687,7 +24692,7 @@
         </p:nvSpPr>
         <p:spPr>
           <a:xfrm>
-            <a:off x="530352" y="2787396"/>
+            <a:off x="530352" y="2859024"/>
             <a:ext cx="45720" cy="751840"/>
           </a:xfrm>
           <a:prstGeom prst="roundRect">
@@ -24733,7 +24738,7 @@
         </p:nvSpPr>
         <p:spPr>
           <a:xfrm>
-            <a:off x="786384" y="2787396"/>
+            <a:off x="786384" y="2859024"/>
             <a:ext cx="10820095" cy="751840"/>
           </a:xfrm>
           <a:prstGeom prst="rect">
@@ -24754,7 +24759,7 @@
                 </a:solidFill>
                 <a:latin typeface="Georgia"/>
               </a:rPr>
-              <a:t>"Pay for ________, guarded by ________ and ________, because paying for hours cost Rs ____ in six weeks for ________."</a:t>
+              <a:t>"Judge the scheme by ________, guarded by ________ and ________, because paying for hours cost Rs ____ in six weeks for ________."</a:t>
             </a:r>
           </a:p>
         </p:txBody>
@@ -24767,7 +24772,7 @@
         </p:nvSpPr>
         <p:spPr>
           <a:xfrm>
-            <a:off x="1247045" y="4252467"/>
+            <a:off x="1247045" y="4324096"/>
             <a:ext cx="9697603" cy="18288"/>
           </a:xfrm>
           <a:prstGeom prst="rect">
@@ -24811,7 +24816,7 @@
         </p:nvSpPr>
         <p:spPr>
           <a:xfrm>
-            <a:off x="530352" y="3685540"/>
+            <a:off x="530352" y="3757168"/>
             <a:ext cx="1433387" cy="168656"/>
           </a:xfrm>
           <a:prstGeom prst="rect">
@@ -24846,7 +24851,7 @@
         </p:nvSpPr>
         <p:spPr>
           <a:xfrm>
-            <a:off x="1146461" y="4161027"/>
+            <a:off x="1146461" y="4232656"/>
             <a:ext cx="201168" cy="201168"/>
           </a:xfrm>
           <a:prstGeom prst="ellipse">
@@ -24890,7 +24895,7 @@
         </p:nvSpPr>
         <p:spPr>
           <a:xfrm>
-            <a:off x="530352" y="4572508"/>
+            <a:off x="530352" y="4644136"/>
             <a:ext cx="1433387" cy="1422400"/>
           </a:xfrm>
           <a:prstGeom prst="roundRect">
@@ -24944,7 +24949,7 @@
         </p:nvSpPr>
         <p:spPr>
           <a:xfrm>
-            <a:off x="694944" y="4718812"/>
+            <a:off x="694944" y="4790440"/>
             <a:ext cx="1104203" cy="251205"/>
           </a:xfrm>
           <a:prstGeom prst="rect">
@@ -24979,7 +24984,7 @@
         </p:nvSpPr>
         <p:spPr>
           <a:xfrm>
-            <a:off x="694944" y="5006594"/>
+            <a:off x="694944" y="5078222"/>
             <a:ext cx="1104203" cy="531876"/>
           </a:xfrm>
           <a:prstGeom prst="rect">
@@ -25014,7 +25019,7 @@
         </p:nvSpPr>
         <p:spPr>
           <a:xfrm>
-            <a:off x="2146619" y="3685540"/>
+            <a:off x="2146619" y="3757168"/>
             <a:ext cx="1433387" cy="168656"/>
           </a:xfrm>
           <a:prstGeom prst="rect">
@@ -25049,7 +25054,7 @@
         </p:nvSpPr>
         <p:spPr>
           <a:xfrm>
-            <a:off x="2762728" y="4161027"/>
+            <a:off x="2762728" y="4232656"/>
             <a:ext cx="201168" cy="201168"/>
           </a:xfrm>
           <a:prstGeom prst="ellipse">
@@ -25093,7 +25098,7 @@
         </p:nvSpPr>
         <p:spPr>
           <a:xfrm>
-            <a:off x="2146619" y="4572508"/>
+            <a:off x="2146619" y="4644136"/>
             <a:ext cx="1433387" cy="1422400"/>
           </a:xfrm>
           <a:prstGeom prst="roundRect">
@@ -25147,7 +25152,7 @@
         </p:nvSpPr>
         <p:spPr>
           <a:xfrm>
-            <a:off x="2311211" y="4718812"/>
+            <a:off x="2311211" y="4790440"/>
             <a:ext cx="1104203" cy="251205"/>
           </a:xfrm>
           <a:prstGeom prst="rect">
@@ -25182,7 +25187,7 @@
         </p:nvSpPr>
         <p:spPr>
           <a:xfrm>
-            <a:off x="2311211" y="5006594"/>
+            <a:off x="2311211" y="5078222"/>
             <a:ext cx="1104203" cy="531876"/>
           </a:xfrm>
           <a:prstGeom prst="rect">
@@ -25217,7 +25222,7 @@
         </p:nvSpPr>
         <p:spPr>
           <a:xfrm>
-            <a:off x="3762886" y="3685540"/>
+            <a:off x="3762886" y="3757168"/>
             <a:ext cx="1433387" cy="168656"/>
           </a:xfrm>
           <a:prstGeom prst="rect">
@@ -25252,7 +25257,7 @@
         </p:nvSpPr>
         <p:spPr>
           <a:xfrm>
-            <a:off x="4378996" y="4161027"/>
+            <a:off x="4378996" y="4232656"/>
             <a:ext cx="201168" cy="201168"/>
           </a:xfrm>
           <a:prstGeom prst="ellipse">
@@ -25296,7 +25301,7 @@
         </p:nvSpPr>
         <p:spPr>
           <a:xfrm>
-            <a:off x="3762886" y="4572508"/>
+            <a:off x="3762886" y="4644136"/>
             <a:ext cx="1433387" cy="1422400"/>
           </a:xfrm>
           <a:prstGeom prst="roundRect">
@@ -25350,7 +25355,7 @@
         </p:nvSpPr>
         <p:spPr>
           <a:xfrm>
-            <a:off x="3927478" y="4718812"/>
+            <a:off x="3927478" y="4790440"/>
             <a:ext cx="1104203" cy="251205"/>
           </a:xfrm>
           <a:prstGeom prst="rect">
@@ -25385,7 +25390,7 @@
         </p:nvSpPr>
         <p:spPr>
           <a:xfrm>
-            <a:off x="3927478" y="5006594"/>
+            <a:off x="3927478" y="5078222"/>
             <a:ext cx="1104203" cy="366776"/>
           </a:xfrm>
           <a:prstGeom prst="rect">
@@ -25420,7 +25425,7 @@
         </p:nvSpPr>
         <p:spPr>
           <a:xfrm>
-            <a:off x="5379153" y="3685540"/>
+            <a:off x="5379153" y="3757168"/>
             <a:ext cx="1433387" cy="168656"/>
           </a:xfrm>
           <a:prstGeom prst="rect">
@@ -25455,7 +25460,7 @@
         </p:nvSpPr>
         <p:spPr>
           <a:xfrm>
-            <a:off x="5995263" y="4161027"/>
+            <a:off x="5995263" y="4232656"/>
             <a:ext cx="201168" cy="201168"/>
           </a:xfrm>
           <a:prstGeom prst="ellipse">
@@ -25499,7 +25504,7 @@
         </p:nvSpPr>
         <p:spPr>
           <a:xfrm>
-            <a:off x="5379153" y="4572508"/>
+            <a:off x="5379153" y="4644136"/>
             <a:ext cx="1433387" cy="1422400"/>
           </a:xfrm>
           <a:prstGeom prst="roundRect">
@@ -25553,7 +25558,7 @@
         </p:nvSpPr>
         <p:spPr>
           <a:xfrm>
-            <a:off x="5543745" y="4718812"/>
+            <a:off x="5543745" y="4790440"/>
             <a:ext cx="1104203" cy="251205"/>
           </a:xfrm>
           <a:prstGeom prst="rect">
@@ -25588,8 +25593,8 @@
         </p:nvSpPr>
         <p:spPr>
           <a:xfrm>
-            <a:off x="5543745" y="5006594"/>
-            <a:ext cx="1104203" cy="366776"/>
+            <a:off x="5543745" y="5078222"/>
+            <a:ext cx="1104203" cy="531876"/>
           </a:xfrm>
           <a:prstGeom prst="rect">
             <a:avLst/>
@@ -25610,7 +25615,7 @@
                 </a:solidFill>
                 <a:latin typeface="Calibri"/>
               </a:rPr>
-              <a:t>What is left out on purpose</a:t>
+              <a:t>What is left out on purpose, each change dated</a:t>
             </a:r>
           </a:p>
         </p:txBody>
@@ -25623,7 +25628,7 @@
         </p:nvSpPr>
         <p:spPr>
           <a:xfrm>
-            <a:off x="6995421" y="3685540"/>
+            <a:off x="6995421" y="3757168"/>
             <a:ext cx="1433387" cy="168656"/>
           </a:xfrm>
           <a:prstGeom prst="rect">
@@ -25658,7 +25663,7 @@
         </p:nvSpPr>
         <p:spPr>
           <a:xfrm>
-            <a:off x="7611530" y="4161027"/>
+            <a:off x="7611530" y="4232656"/>
             <a:ext cx="201168" cy="201168"/>
           </a:xfrm>
           <a:prstGeom prst="ellipse">
@@ -25702,7 +25707,7 @@
         </p:nvSpPr>
         <p:spPr>
           <a:xfrm>
-            <a:off x="6995421" y="4572508"/>
+            <a:off x="6995421" y="4644136"/>
             <a:ext cx="1433387" cy="1422400"/>
           </a:xfrm>
           <a:prstGeom prst="roundRect">
@@ -25756,7 +25761,7 @@
         </p:nvSpPr>
         <p:spPr>
           <a:xfrm>
-            <a:off x="7160013" y="4718812"/>
+            <a:off x="7160013" y="4790440"/>
             <a:ext cx="1104203" cy="465836"/>
           </a:xfrm>
           <a:prstGeom prst="rect">
@@ -25791,7 +25796,7 @@
         </p:nvSpPr>
         <p:spPr>
           <a:xfrm>
-            <a:off x="7160013" y="5221224"/>
+            <a:off x="7160013" y="5292852"/>
             <a:ext cx="1104203" cy="531876"/>
           </a:xfrm>
           <a:prstGeom prst="rect">
@@ -25826,7 +25831,7 @@
         </p:nvSpPr>
         <p:spPr>
           <a:xfrm>
-            <a:off x="8611688" y="3685540"/>
+            <a:off x="8611688" y="3757168"/>
             <a:ext cx="1433387" cy="168656"/>
           </a:xfrm>
           <a:prstGeom prst="rect">
@@ -25861,7 +25866,7 @@
         </p:nvSpPr>
         <p:spPr>
           <a:xfrm>
-            <a:off x="9227798" y="4161027"/>
+            <a:off x="9227798" y="4232656"/>
             <a:ext cx="201168" cy="201168"/>
           </a:xfrm>
           <a:prstGeom prst="ellipse">
@@ -25905,7 +25910,7 @@
         </p:nvSpPr>
         <p:spPr>
           <a:xfrm>
-            <a:off x="8611688" y="4572508"/>
+            <a:off x="8611688" y="4644136"/>
             <a:ext cx="1433387" cy="1422400"/>
           </a:xfrm>
           <a:prstGeom prst="roundRect">
@@ -25959,7 +25964,7 @@
         </p:nvSpPr>
         <p:spPr>
           <a:xfrm>
-            <a:off x="8776280" y="4718812"/>
+            <a:off x="8776280" y="4790440"/>
             <a:ext cx="1104203" cy="251205"/>
           </a:xfrm>
           <a:prstGeom prst="rect">
@@ -25994,8 +25999,8 @@
         </p:nvSpPr>
         <p:spPr>
           <a:xfrm>
-            <a:off x="8776280" y="5006594"/>
-            <a:ext cx="1104203" cy="531876"/>
+            <a:off x="8776280" y="5078222"/>
+            <a:ext cx="1104203" cy="696976"/>
           </a:xfrm>
           <a:prstGeom prst="rect">
             <a:avLst/>
@@ -26016,7 +26021,7 @@
                 </a:solidFill>
                 <a:latin typeface="Calibri"/>
               </a:rPr>
-              <a:t>The numbers that must not get worse</a:t>
+              <a:t>Must not get worse: two for riders, one for the budget</a:t>
             </a:r>
           </a:p>
         </p:txBody>
@@ -26029,7 +26034,7 @@
         </p:nvSpPr>
         <p:spPr>
           <a:xfrm>
-            <a:off x="10227955" y="3685540"/>
+            <a:off x="10227955" y="3757168"/>
             <a:ext cx="1433387" cy="168656"/>
           </a:xfrm>
           <a:prstGeom prst="rect">
@@ -26064,7 +26069,7 @@
         </p:nvSpPr>
         <p:spPr>
           <a:xfrm>
-            <a:off x="10844065" y="4161027"/>
+            <a:off x="10844065" y="4232656"/>
             <a:ext cx="201168" cy="201168"/>
           </a:xfrm>
           <a:prstGeom prst="ellipse">
@@ -26108,7 +26113,7 @@
         </p:nvSpPr>
         <p:spPr>
           <a:xfrm>
-            <a:off x="10227955" y="4572508"/>
+            <a:off x="10227955" y="4644136"/>
             <a:ext cx="1433387" cy="1422400"/>
           </a:xfrm>
           <a:prstGeom prst="roundRect">
@@ -26162,7 +26167,7 @@
         </p:nvSpPr>
         <p:spPr>
           <a:xfrm>
-            <a:off x="10392547" y="4718812"/>
+            <a:off x="10392547" y="4790440"/>
             <a:ext cx="1104203" cy="251205"/>
           </a:xfrm>
           <a:prstGeom prst="rect">
@@ -26197,7 +26202,7 @@
         </p:nvSpPr>
         <p:spPr>
           <a:xfrm>
-            <a:off x="10392547" y="5006594"/>
+            <a:off x="10392547" y="5078222"/>
             <a:ext cx="1104203" cy="696976"/>
           </a:xfrm>
           <a:prstGeom prst="rect">
@@ -28758,7 +28763,7 @@
       </p:sp>
       <p:pic>
         <p:nvPicPr>
-          <p:cNvPr id="9" name="mermaid diagram" descr="81d4f9e0d7d09345.png"/>
+          <p:cNvPr id="9" name="mermaid diagram" descr="be7c6c0303852b06.png"/>
           <p:cNvPicPr>
             <a:picLocks noChangeAspect="1"/>
           </p:cNvPicPr>
@@ -28772,8 +28777,8 @@
         </p:blipFill>
         <p:spPr>
           <a:xfrm>
-            <a:off x="2711323" y="1664208"/>
-            <a:ext cx="6769047" cy="3256280"/>
+            <a:off x="2998559" y="1664208"/>
+            <a:ext cx="6194576" cy="2979928"/>
           </a:xfrm>
           <a:prstGeom prst="rect">
             <a:avLst/>
@@ -28788,8 +28793,8 @@
         </p:nvSpPr>
         <p:spPr>
           <a:xfrm>
-            <a:off x="530352" y="4966208"/>
-            <a:ext cx="11130991" cy="1233424"/>
+            <a:off x="530352" y="4689856"/>
+            <a:ext cx="11130991" cy="1509775"/>
           </a:xfrm>
           <a:prstGeom prst="rect">
             <a:avLst/>
@@ -28836,7 +28841,7 @@
                 </a:solidFill>
                 <a:latin typeface="Calibri"/>
               </a:rPr>
-              <a:t> name the ways of hitting it that hurt riders or the budget. </a:t>
+              <a:t> name the ways of hitting it that hurt riders (guardrails 1 and 2) or the budget (guardrail 3). </a:t>
             </a:r>
             <a:r>
               <a:rPr sz="1600" b="1" i="0">
@@ -28854,7 +28859,7 @@
                 </a:solidFill>
                 <a:latin typeface="Calibri"/>
               </a:rPr>
-              <a:t> are what the city team can move this week before the north star catches up. Read the north star and its guardrails as a </a:t>
+              <a:t> are what the city team can move this week, such as drivers online in the first hour of each peak window, before the north star catches up. Read the north star and its guardrails as a </a:t>
             </a:r>
             <a:r>
               <a:rPr sz="1600" b="1" i="0">
@@ -28872,7 +28877,7 @@
                 </a:solidFill>
                 <a:latin typeface="Calibri"/>
               </a:rPr>
-              <a:t>: when the north star rises and a guardrail drops, the rise was bought.</a:t>
+              <a:t>: if the north star rises while a guardrail moves the wrong way (fewer offers accepted, a longer wait, more top-up per trip), riders or the budget paid for the rise.</a:t>
             </a:r>
           </a:p>
         </p:txBody>
@@ -29406,8 +29411,8 @@
         </p:blipFill>
         <p:spPr>
           <a:xfrm>
-            <a:off x="2340090" y="1664208"/>
-            <a:ext cx="7511513" cy="2939288"/>
+            <a:off x="2693207" y="1664208"/>
+            <a:ext cx="6805280" cy="2662936"/>
           </a:xfrm>
           <a:prstGeom prst="rect">
             <a:avLst/>
@@ -29422,7 +29427,7 @@
         </p:nvSpPr>
         <p:spPr>
           <a:xfrm>
-            <a:off x="530352" y="4640072"/>
+            <a:off x="530352" y="4363720"/>
             <a:ext cx="11130991" cy="316992"/>
           </a:xfrm>
           <a:prstGeom prst="rect">
@@ -29457,20 +29462,29 @@
         </p:nvSpPr>
         <p:spPr>
           <a:xfrm>
-            <a:off x="530352" y="4966208"/>
-            <a:ext cx="11130991" cy="1233424"/>
-          </a:xfrm>
-          <a:prstGeom prst="rect">
-            <a:avLst/>
-          </a:prstGeom>
-          <a:noFill/>
-        </p:spPr>
-        <p:txBody>
-          <a:bodyPr wrap="square" anchor="t" lIns="0" rIns="0" tIns="0" bIns="0">
-            <a:spAutoFit/>
-          </a:bodyPr>
-          <a:lstStyle/>
-          <a:p>
+            <a:off x="530352" y="4689856"/>
+            <a:ext cx="11130991" cy="1509775"/>
+          </a:xfrm>
+          <a:prstGeom prst="rect">
+            <a:avLst/>
+          </a:prstGeom>
+          <a:noFill/>
+        </p:spPr>
+        <p:txBody>
+          <a:bodyPr wrap="square" anchor="t" lIns="0" rIns="0" tIns="0" bIns="0">
+            <a:spAutoFit/>
+          </a:bodyPr>
+          <a:lstStyle/>
+          <a:p>
+            <a:r>
+              <a:rPr sz="1600" b="1" i="0">
+                <a:solidFill>
+                  <a:srgbClr val="1A1440"/>
+                </a:solidFill>
+                <a:latin typeface="Calibri"/>
+              </a:rPr>
+              <a:t>Leading</a:t>
+            </a:r>
             <a:r>
               <a:rPr sz="1600" b="0" i="0">
                 <a:solidFill>
@@ -29478,7 +29492,7 @@
                 </a:solidFill>
                 <a:latin typeface="Calibri"/>
               </a:rPr>
-              <a:t>A </a:t>
+              <a:t> and </a:t>
             </a:r>
             <a:r>
               <a:rPr sz="1600" b="1" i="0">
@@ -29487,7 +29501,7 @@
                 </a:solidFill>
                 <a:latin typeface="Calibri"/>
               </a:rPr>
-              <a:t>leading</a:t>
+              <a:t>lagging</a:t>
             </a:r>
             <a:r>
               <a:rPr sz="1600" b="0" i="0">
@@ -29496,25 +29510,7 @@
                 </a:solidFill>
                 <a:latin typeface="Calibri"/>
               </a:rPr>
-              <a:t> input moves before the number the plan is judged on; a </a:t>
-            </a:r>
-            <a:r>
-              <a:rPr sz="1600" b="1" i="0">
-                <a:solidFill>
-                  <a:srgbClr val="1A1440"/>
-                </a:solidFill>
-                <a:latin typeface="Calibri"/>
-              </a:rPr>
-              <a:t>lagging</a:t>
-            </a:r>
-            <a:r>
-              <a:rPr sz="1600" b="0" i="0">
-                <a:solidFill>
-                  <a:srgbClr val="1A1440"/>
-                </a:solidFill>
-                <a:latin typeface="Calibri"/>
-              </a:rPr>
-              <a:t> one confirms it later. Acceptance fell to its new level in the launch week (0.729); bookings per online hour fell to Rs 271 that week and kept falling to Rs 259 by the third. A city team watching acceptance would have seen the gaming in week one.</a:t>
+              <a:t> say when a number moves: a leading number moves before the north star, a lagging one confirms it later. That is a separate question from the job a number does, so acceptance is guardrail 1 and also a leading number. It fell to its new level in the launch week (0.729), while bookings per online hour, the fares riders paid per hour, fell to Rs 271 that week and kept falling to Rs 259.1 by the third. A city team watching acceptance would have seen the gaming in week one.</a:t>
             </a:r>
           </a:p>
         </p:txBody>
@@ -30041,8 +30037,8 @@
           <p:nvPr/>
         </p:nvGraphicFramePr>
         <p:xfrm>
-          <a:off x="530352" y="1956816"/>
-          <a:ext cx="11130990" cy="2682240"/>
+          <a:off x="530352" y="1844040"/>
+          <a:ext cx="11130990" cy="3304032"/>
         </p:xfrm>
         <a:graphic>
           <a:graphicData uri="http://schemas.openxmlformats.org/drawingml/2006/table">
@@ -30051,17 +30047,17 @@
                 <a:tableStyleId>{2D5ABB26-0587-4C30-8999-92F81FD0307C}</a:tableStyleId>
               </a:tblPr>
               <a:tblGrid>
-                <a:gridCol w="2978555"/>
-                <a:gridCol w="8152435"/>
+                <a:gridCol w="2813090"/>
+                <a:gridCol w="8317900"/>
               </a:tblGrid>
-              <a:tr h="335280">
+              <a:tr h="318008">
                 <a:tc>
                   <a:txBody>
                     <a:bodyPr/>
                     <a:lstStyle/>
                     <a:p>
                       <a:r>
-                        <a:rPr sz="1250" b="1" i="0">
+                        <a:rPr sz="1150" b="1" i="0">
                           <a:solidFill>
                             <a:srgbClr val="FFFFFF"/>
                           </a:solidFill>
@@ -30083,7 +30079,7 @@
                     <a:lstStyle/>
                     <a:p>
                       <a:r>
-                        <a:rPr sz="1250" b="1" i="0">
+                        <a:rPr sz="1150" b="1" i="0">
                           <a:solidFill>
                             <a:srgbClr val="FFFFFF"/>
                           </a:solidFill>
@@ -30100,14 +30096,14 @@
                   </a:tcPr>
                 </a:tc>
               </a:tr>
-              <a:tr h="335280">
+              <a:tr h="508000">
                 <a:tc>
                   <a:txBody>
                     <a:bodyPr/>
                     <a:lstStyle/>
                     <a:p>
                       <a:r>
-                        <a:rPr sz="1200" b="0" i="0">
+                        <a:rPr sz="1100" b="0" i="0">
                           <a:solidFill>
                             <a:srgbClr val="1A1440"/>
                           </a:solidFill>
@@ -30129,13 +30125,13 @@
                     <a:lstStyle/>
                     <a:p>
                       <a:r>
-                        <a:rPr sz="1200" b="0" i="0">
+                        <a:rPr sz="1100" b="0" i="0">
                           <a:solidFill>
                             <a:srgbClr val="1A1440"/>
                           </a:solidFill>
                           <a:latin typeface="Calibri"/>
                         </a:rPr>
-                        <a:t>Trips completed inside the peak windows, counted per paying rider, as Uber's own filing counts trips</a:t>
+                        <a:t>Trips completed inside the peak windows, one per paying rider: Uber's annual report counts an UberX Share ride with three paying riders as three trips</a:t>
                       </a:r>
                     </a:p>
                   </a:txBody>
@@ -30146,14 +30142,14 @@
                   </a:tcPr>
                 </a:tc>
               </a:tr>
-              <a:tr h="335280">
+              <a:tr h="318008">
                 <a:tc>
                   <a:txBody>
                     <a:bodyPr/>
                     <a:lstStyle/>
                     <a:p>
                       <a:r>
-                        <a:rPr sz="1200" b="0" i="0">
+                        <a:rPr sz="1100" b="0" i="0">
                           <a:solidFill>
                             <a:srgbClr val="1A1440"/>
                           </a:solidFill>
@@ -30175,7 +30171,7 @@
                     <a:lstStyle/>
                     <a:p>
                       <a:r>
-                        <a:rPr sz="1200" b="0" i="0">
+                        <a:rPr sz="1100" b="0" i="0">
                           <a:solidFill>
                             <a:srgbClr val="1A1440"/>
                           </a:solidFill>
@@ -30192,14 +30188,14 @@
                   </a:tcPr>
                 </a:tc>
               </a:tr>
-              <a:tr h="335280">
+              <a:tr h="318008">
                 <a:tc>
                   <a:txBody>
                     <a:bodyPr/>
                     <a:lstStyle/>
                     <a:p>
                       <a:r>
-                        <a:rPr sz="1200" b="0" i="0">
+                        <a:rPr sz="1100" b="0" i="0">
                           <a:solidFill>
                             <a:srgbClr val="1A1440"/>
                           </a:solidFill>
@@ -30221,7 +30217,7 @@
                     <a:lstStyle/>
                     <a:p>
                       <a:r>
-                        <a:rPr sz="1200" b="0" i="0">
+                        <a:rPr sz="1100" b="0" i="0">
                           <a:solidFill>
                             <a:srgbClr val="1A1440"/>
                           </a:solidFill>
@@ -30238,14 +30234,14 @@
                   </a:tcPr>
                 </a:tc>
               </a:tr>
-              <a:tr h="335280">
+              <a:tr h="318008">
                 <a:tc>
                   <a:txBody>
                     <a:bodyPr/>
                     <a:lstStyle/>
                     <a:p>
                       <a:r>
-                        <a:rPr sz="1200" b="0" i="0">
+                        <a:rPr sz="1100" b="0" i="0">
                           <a:solidFill>
                             <a:srgbClr val="1A1440"/>
                           </a:solidFill>
@@ -30267,7 +30263,7 @@
                     <a:lstStyle/>
                     <a:p>
                       <a:r>
-                        <a:rPr sz="1200" b="0" i="0">
+                        <a:rPr sz="1100" b="0" i="0">
                           <a:solidFill>
                             <a:srgbClr val="1A1440"/>
                           </a:solidFill>
@@ -30284,14 +30280,14 @@
                   </a:tcPr>
                 </a:tc>
               </a:tr>
-              <a:tr h="335280">
+              <a:tr h="508000">
                 <a:tc>
                   <a:txBody>
                     <a:bodyPr/>
                     <a:lstStyle/>
                     <a:p>
                       <a:r>
-                        <a:rPr sz="1200" b="0" i="0">
+                        <a:rPr sz="1100" b="0" i="0">
                           <a:solidFill>
                             <a:srgbClr val="1A1440"/>
                           </a:solidFill>
@@ -30313,13 +30309,13 @@
                     <a:lstStyle/>
                     <a:p>
                       <a:r>
-                        <a:rPr sz="1200" b="0" i="0">
+                        <a:rPr sz="1100" b="0" i="0">
                           <a:solidFill>
                             <a:srgbClr val="1A1440"/>
                           </a:solidFill>
                           <a:latin typeface="Calibri"/>
                         </a:rPr>
-                        <a:t>Hours online, offers declined, a shrinking enrolled base</a:t>
+                        <a:t>Hours online; offers declined; a shrinking enrolled base, since fewer drivers in the count would raise the rate with no extra trip</a:t>
                       </a:r>
                     </a:p>
                   </a:txBody>
@@ -30330,14 +30326,14 @@
                   </a:tcPr>
                 </a:tc>
               </a:tr>
-              <a:tr h="335280">
+              <a:tr h="508000">
                 <a:tc>
                   <a:txBody>
                     <a:bodyPr/>
                     <a:lstStyle/>
                     <a:p>
                       <a:r>
-                        <a:rPr sz="1200" b="0" i="0">
+                        <a:rPr sz="1100" b="0" i="0">
                           <a:solidFill>
                             <a:srgbClr val="1A1440"/>
                           </a:solidFill>
@@ -30359,13 +30355,13 @@
                     <a:lstStyle/>
                     <a:p>
                       <a:r>
-                        <a:rPr sz="1200" b="0" i="0">
+                        <a:rPr sz="1100" b="0" i="0">
                           <a:solidFill>
                             <a:srgbClr val="1A1440"/>
                           </a:solidFill>
                           <a:latin typeface="Calibri"/>
                         </a:rPr>
-                        <a:t>Accepted share at or above a floor the city sets; median rider wait; top-up per completed trip</a:t>
+                        <a:t>For riders: accepted share at or above a floor the city sets, and the median rider wait. For the budget: top-up per completed trip</a:t>
                       </a:r>
                     </a:p>
                   </a:txBody>
@@ -30376,14 +30372,14 @@
                   </a:tcPr>
                 </a:tc>
               </a:tr>
-              <a:tr h="335280">
+              <a:tr h="508000">
                 <a:tc>
                   <a:txBody>
                     <a:bodyPr/>
                     <a:lstStyle/>
                     <a:p>
                       <a:r>
-                        <a:rPr sz="1200" b="0" i="0">
+                        <a:rPr sz="1100" b="0" i="0">
                           <a:solidFill>
                             <a:srgbClr val="1A1440"/>
                           </a:solidFill>
@@ -30405,13 +30401,13 @@
                     <a:lstStyle/>
                     <a:p>
                       <a:r>
-                        <a:rPr sz="1200" b="0" i="0">
+                        <a:rPr sz="1100" b="0" i="0">
                           <a:solidFill>
                             <a:srgbClr val="1A1440"/>
                           </a:solidFill>
                           <a:latin typeface="Calibri"/>
                         </a:rPr>
-                        <a:t>Each guardrail names the way of hitting the north star it catches</a:t>
+                        <a:t>Guardrail 1 catches declining and cherry-picking; guardrail 2, supply that stops serving riders; guardrail 3, a top-up that runs away from the trips it pays for</a:t>
                       </a:r>
                     </a:p>
                   </a:txBody>
@@ -30434,8 +30430,8 @@
         </p:nvSpPr>
         <p:spPr>
           <a:xfrm>
-            <a:off x="530352" y="4895088"/>
-            <a:ext cx="11130991" cy="703072"/>
+            <a:off x="530352" y="5404104"/>
+            <a:ext cx="11130991" cy="633984"/>
           </a:xfrm>
           <a:prstGeom prst="rect">
             <a:avLst/>
@@ -30450,11 +30446,11 @@
           <a:p>
             <a:pPr>
               <a:spcAft>
-                <a:spcPts val="700"/>
+                <a:spcPts val="600"/>
               </a:spcAft>
             </a:pPr>
             <a:r>
-              <a:rPr sz="1400" b="0" i="0">
+              <a:rPr sz="1200" b="0" i="0">
                 <a:solidFill>
                   <a:srgbClr val="1A1440"/>
                 </a:solidFill>
@@ -30987,7 +30983,7 @@
         <p:spPr>
           <a:xfrm>
             <a:off x="530352" y="1956816"/>
-            <a:ext cx="11130991" cy="1601216"/>
+            <a:ext cx="11130991" cy="1877568"/>
           </a:xfrm>
           <a:prstGeom prst="rect">
             <a:avLst/>
@@ -31012,7 +31008,7 @@
                 </a:solidFill>
                 <a:latin typeface="Calibri"/>
               </a:rPr>
-              <a:t>The US Department of Veterans Affairs measured patient wait from a "desired date" that schedulers entered. At its Phoenix facility, of 79 staff interviewed, 30 said they had used the wrong desired date, producing false zero-day waits, and 11 said they "fixed" waits over 14 days by rebooking with a later desired date. After the Inspector General's interim report, the 14-day goal was removed from employee performance contracts (VA OIG report 14-02603-267, August 2014, checked 12 October 2026).</a:t>
+              <a:t>The US Department of Veterans Affairs measured patient wait from a "desired date" that schedulers entered. At its Phoenix facility, of 79 staff interviewed, 30 said they had used the wrong desired date, producing false zero-day waits, and 11 said they "fixed" waits longer than the 14-day goal by rebooking with a later desired date. After the interim report of the VA's Office of Inspector General (OIG), the 14-day goal was removed from employee performance contracts (VA OIG report 14-02603-267, August 2014, checked 12 October 2026).</a:t>
             </a:r>
           </a:p>
         </p:txBody>
@@ -31025,7 +31021,7 @@
         </p:nvSpPr>
         <p:spPr>
           <a:xfrm>
-            <a:off x="530352" y="3686048"/>
+            <a:off x="530352" y="3962400"/>
             <a:ext cx="11130991" cy="807720"/>
           </a:xfrm>
           <a:prstGeom prst="roundRect">
@@ -31073,7 +31069,7 @@
         </p:nvSpPr>
         <p:spPr>
           <a:xfrm>
-            <a:off x="676656" y="3814064"/>
+            <a:off x="676656" y="4090415"/>
             <a:ext cx="45720" cy="551688"/>
           </a:xfrm>
           <a:prstGeom prst="roundRect">
@@ -31119,7 +31115,7 @@
         </p:nvSpPr>
         <p:spPr>
           <a:xfrm>
-            <a:off x="877824" y="3804920"/>
+            <a:off x="877824" y="4081272"/>
             <a:ext cx="10564063" cy="624840"/>
           </a:xfrm>
           <a:prstGeom prst="rect">
@@ -32283,8 +32279,8 @@
         </p:blipFill>
         <p:spPr>
           <a:xfrm>
-            <a:off x="2523003" y="1664208"/>
-            <a:ext cx="7145688" cy="2951480"/>
+            <a:off x="2759758" y="1664208"/>
+            <a:ext cx="6672178" cy="2755900"/>
           </a:xfrm>
           <a:prstGeom prst="rect">
             <a:avLst/>
@@ -32299,7 +32295,7 @@
         </p:nvSpPr>
         <p:spPr>
           <a:xfrm>
-            <a:off x="530352" y="4652264"/>
+            <a:off x="530352" y="4456684"/>
             <a:ext cx="11130991" cy="316992"/>
           </a:xfrm>
           <a:prstGeom prst="rect">
@@ -32334,8 +32330,8 @@
         </p:nvSpPr>
         <p:spPr>
           <a:xfrm>
-            <a:off x="530352" y="4978400"/>
-            <a:ext cx="11130991" cy="1056640"/>
+            <a:off x="530352" y="4782820"/>
+            <a:ext cx="11130991" cy="1252220"/>
           </a:xfrm>
           <a:prstGeom prst="roundRect">
             <a:avLst>
@@ -32382,8 +32378,8 @@
         </p:nvSpPr>
         <p:spPr>
           <a:xfrm>
-            <a:off x="676656" y="5106416"/>
-            <a:ext cx="45720" cy="800608"/>
+            <a:off x="676656" y="4910836"/>
+            <a:ext cx="45720" cy="996188"/>
           </a:xfrm>
           <a:prstGeom prst="roundRect">
             <a:avLst>
@@ -32428,8 +32424,8 @@
         </p:nvSpPr>
         <p:spPr>
           <a:xfrm>
-            <a:off x="877824" y="5097272"/>
-            <a:ext cx="10564063" cy="873760"/>
+            <a:off x="877824" y="4901692"/>
+            <a:ext cx="10564063" cy="1069340"/>
           </a:xfrm>
           <a:prstGeom prst="rect">
             <a:avLst/>
@@ -32458,7 +32454,7 @@
                 </a:solidFill>
                 <a:latin typeface="Calibri"/>
               </a:rPr>
-              <a:t>Without the new drivers the rate is still 1.58. In the three busiest weeks of the twelve, the first three after the launch, it was already 1.60, which bounds the monsoon argument. In the core zones it fell from 1.90 to 1.79, so the fall sits mostly in the thin outer zones. Three doubts stay open: drivers on two apps (Uber cannot see the other app, and the data holds weeks, not hours), who chose to enrol (every driver in these tables enrolled), and cause (only a test of the redesign settles it).</a:t>
+              <a:t>Without the new drivers the rate is still 1.58. In the three weeks with the most rider requests, the first three after the launch and still in the rains, it already read 1.60, so the monsoon's end cannot explain the fall. In the nine core zones it fell from 1.90 to 1.79, so the fall sits mostly in the three outer zones. Three doubts stay open: drivers on two apps (the data holds weekly totals, so it cannot show a decline made because another app's trip was under way), who chose to enrol (every driver here enrolled, so no group stayed out to compare with), and cause (only a test of the redesign settles it).</a:t>
             </a:r>
           </a:p>
         </p:txBody>
@@ -32978,7 +32974,7 @@
       </p:sp>
       <p:pic>
         <p:nvPicPr>
-          <p:cNvPr id="9" name="mermaid diagram" descr="6d1f63feeb8caadd.png"/>
+          <p:cNvPr id="9" name="mermaid diagram" descr="40e27b40e15d5162.png"/>
           <p:cNvPicPr>
             <a:picLocks noChangeAspect="1"/>
           </p:cNvPicPr>
@@ -32992,8 +32988,8 @@
         </p:blipFill>
         <p:spPr>
           <a:xfrm>
-            <a:off x="1157522" y="1664208"/>
-            <a:ext cx="9876650" cy="3517392"/>
+            <a:off x="1349022" y="1664208"/>
+            <a:ext cx="9493650" cy="3517392"/>
           </a:xfrm>
           <a:prstGeom prst="rect">
             <a:avLst/>
@@ -33132,7 +33128,7 @@
                 </a:solidFill>
                 <a:latin typeface="Calibri"/>
               </a:rPr>
-              <a:t>Pay for completed peak trips per enrolled driver online at peak, guarded by acceptance, the rider's wait and the top-up per trip.</a:t>
+              <a:t>Pay for completed peak trips per enrolled driver online at peak, guarded for riders by acceptance and the wait, and for the budget by the top-up per trip.</a:t>
             </a:r>
           </a:p>
         </p:txBody>
@@ -33652,7 +33648,7 @@
       </p:sp>
       <p:pic>
         <p:nvPicPr>
-          <p:cNvPr id="9" name="mermaid diagram" descr="8b082f530e261213.png"/>
+          <p:cNvPr id="9" name="mermaid diagram" descr="1c14af4fbb8cd53b.png"/>
           <p:cNvPicPr>
             <a:picLocks noChangeAspect="1"/>
           </p:cNvPicPr>
@@ -33666,8 +33662,8 @@
         </p:blipFill>
         <p:spPr>
           <a:xfrm>
-            <a:off x="3239109" y="1664208"/>
-            <a:ext cx="5713476" cy="3808984"/>
+            <a:off x="3375144" y="1664208"/>
+            <a:ext cx="5441405" cy="3808984"/>
           </a:xfrm>
           <a:prstGeom prst="rect">
             <a:avLst/>
@@ -34353,7 +34349,7 @@
         <p:spPr>
           <a:xfrm>
             <a:off x="530352" y="2843784"/>
-            <a:ext cx="2079894" cy="1422400"/>
+            <a:ext cx="2079894" cy="1595120"/>
           </a:xfrm>
           <a:prstGeom prst="roundRect">
             <a:avLst>
@@ -34442,7 +34438,7 @@
         <p:spPr>
           <a:xfrm>
             <a:off x="694944" y="3277870"/>
-            <a:ext cx="1750710" cy="696976"/>
+            <a:ext cx="1750710" cy="862076"/>
           </a:xfrm>
           <a:prstGeom prst="rect">
             <a:avLst/>
@@ -34463,7 +34459,7 @@
                 </a:solidFill>
                 <a:latin typeface="Calibri"/>
               </a:rPr>
-              <a:t>Each group writes the redesign's definition and prices the saving; the three roles attack it</a:t>
+              <a:t>Round 2 was the morning's chapters; now each group writes and prices the redesign, and the roles attack it</a:t>
             </a:r>
           </a:p>
         </p:txBody>
@@ -34556,7 +34552,7 @@
         <p:spPr>
           <a:xfrm>
             <a:off x="2793126" y="2843784"/>
-            <a:ext cx="2079894" cy="1422400"/>
+            <a:ext cx="2079894" cy="1595120"/>
           </a:xfrm>
           <a:prstGeom prst="roundRect">
             <a:avLst>
@@ -34759,7 +34755,7 @@
         <p:spPr>
           <a:xfrm>
             <a:off x="5055900" y="2843784"/>
-            <a:ext cx="2079894" cy="1422400"/>
+            <a:ext cx="2079894" cy="1595120"/>
           </a:xfrm>
           <a:prstGeom prst="roundRect">
             <a:avLst>
@@ -34962,7 +34958,7 @@
         <p:spPr>
           <a:xfrm>
             <a:off x="7318674" y="2843784"/>
-            <a:ext cx="2079894" cy="1422400"/>
+            <a:ext cx="2079894" cy="1595120"/>
           </a:xfrm>
           <a:prstGeom prst="roundRect">
             <a:avLst>
@@ -35165,7 +35161,7 @@
         <p:spPr>
           <a:xfrm>
             <a:off x="9581448" y="2843784"/>
-            <a:ext cx="2079894" cy="1422400"/>
+            <a:ext cx="2079894" cy="1595120"/>
           </a:xfrm>
           <a:prstGeom prst="roundRect">
             <a:avLst>
@@ -35767,7 +35763,7 @@
         <p:spPr>
           <a:xfrm>
             <a:off x="530352" y="1243584"/>
-            <a:ext cx="11130991" cy="234696"/>
+            <a:ext cx="11130991" cy="218186"/>
           </a:xfrm>
           <a:prstGeom prst="rect">
             <a:avLst/>
@@ -35782,13 +35778,13 @@
           <a:p>
             <a:pPr algn="l"/>
             <a:r>
-              <a:rPr sz="1200" b="0" i="0">
+              <a:rPr sz="1100" b="0" i="0">
                 <a:solidFill>
                   <a:srgbClr val="6B6690"/>
                 </a:solidFill>
                 <a:latin typeface="Calibri"/>
               </a:rPr>
-              <a:t>Which number does each of the city team's three roles want celebrated, and how could each rise while riders waited longer?</a:t>
+              <a:t>Which number does each of the city team's three roles want the scheme judged on, and how could each look good while riders were served no better?</a:t>
             </a:r>
           </a:p>
         </p:txBody>
@@ -36242,7 +36238,7 @@
                 </a:solidFill>
                 <a:latin typeface="Calibri"/>
               </a:rPr>
-              <a:t>The guarantee is the acquisition story; every sign-up counts</a:t>
+              <a:t>The guarantee is the story that wins new drivers; every sign-up counts</a:t>
             </a:r>
           </a:p>
         </p:txBody>
@@ -36469,7 +36465,7 @@
                 </a:solidFill>
                 <a:latin typeface="Calibri"/>
               </a:rPr>
-              <a:t>Holds the budget; wants each rupee of top-up to buy a trip</a:t>
+              <a:t>Holds the budget; wants each rupee of top-up to buy a trip, so wants this number low</a:t>
             </a:r>
           </a:p>
         </p:txBody>
@@ -36483,7 +36479,7 @@
         <p:spPr>
           <a:xfrm>
             <a:off x="530352" y="4104132"/>
-            <a:ext cx="11130991" cy="772160"/>
+            <a:ext cx="11130991" cy="1048512"/>
           </a:xfrm>
           <a:prstGeom prst="rect">
             <a:avLst/>
@@ -36517,7 +36513,7 @@
                 </a:solidFill>
                 <a:latin typeface="Calibri"/>
               </a:rPr>
-              <a:t> Could a team hit this number while riders waited longer? Who controls the count? What does the number deliberately not reward?</a:t>
+              <a:t> A proxy is a number that stands in for the thing wanted. Could a team hit this number while riders were served no better? Who controls the count? What does the number deliberately not reward?</a:t>
             </a:r>
           </a:p>
         </p:txBody>
@@ -37506,7 +37502,7 @@
                 </a:solidFill>
                 <a:latin typeface="Georgia"/>
               </a:rPr>
-              <a:t>Which number can a driver raise without driving?</a:t>
+              <a:t>Which number can rise with no rider at all?</a:t>
             </a:r>
           </a:p>
         </p:txBody>
@@ -37541,7 +37537,7 @@
                 </a:solidFill>
                 <a:latin typeface="Calibri"/>
               </a:rPr>
-              <a:t>Before any data, which of four city numbers needs no rider at all to rise?</a:t>
+              <a:t>Before any data, which of four city numbers can a driver raise without a single rider asking for a trip?</a:t>
             </a:r>
           </a:p>
         </p:txBody>
@@ -38804,7 +38800,7 @@
                 </a:solidFill>
                 <a:latin typeface="Georgia"/>
               </a:rPr>
-              <a:t>A canteen paid per token: tokens double</a:t>
+              <a:t>A canteen pays per token: tokens double</a:t>
             </a:r>
           </a:p>
         </p:txBody>
@@ -38846,7 +38842,7 @@
       </p:sp>
       <p:pic>
         <p:nvPicPr>
-          <p:cNvPr id="9" name="mermaid diagram" descr="ef9354611f3c4382.png"/>
+          <p:cNvPr id="9" name="mermaid diagram" descr="4f63bf6b50392052.png"/>
           <p:cNvPicPr>
             <a:picLocks noChangeAspect="1"/>
           </p:cNvPicPr>
@@ -38861,7 +38857,7 @@
         <p:spPr>
           <a:xfrm>
             <a:off x="530352" y="1956816"/>
-            <a:ext cx="11130991" cy="1855165"/>
+            <a:ext cx="11130991" cy="1770558"/>
           </a:xfrm>
           <a:prstGeom prst="rect">
             <a:avLst/>
@@ -38876,7 +38872,7 @@
         </p:nvSpPr>
         <p:spPr>
           <a:xfrm>
-            <a:off x="530352" y="3958285"/>
+            <a:off x="530352" y="3873678"/>
             <a:ext cx="11130991" cy="1074420"/>
           </a:xfrm>
           <a:prstGeom prst="roundRect">
@@ -38924,7 +38920,7 @@
         </p:nvSpPr>
         <p:spPr>
           <a:xfrm>
-            <a:off x="676656" y="4086301"/>
+            <a:off x="676656" y="4001694"/>
             <a:ext cx="45720" cy="818388"/>
           </a:xfrm>
           <a:prstGeom prst="roundRect">
@@ -38970,7 +38966,7 @@
         </p:nvSpPr>
         <p:spPr>
           <a:xfrm>
-            <a:off x="877824" y="4077157"/>
+            <a:off x="877824" y="3992550"/>
             <a:ext cx="10564063" cy="891540"/>
           </a:xfrm>
           <a:prstGeom prst="rect">

--- a/content/W04/D1/slides/C2_W04_D01_half1_STUDENT.pptx
+++ b/content/W04/D1/slides/C2_W04_D01_half1_STUDENT.pptx
@@ -10520,7 +10520,7 @@
       </p:sp>
       <p:pic>
         <p:nvPicPr>
-          <p:cNvPr id="9" name="mermaid diagram" descr="9dc97cb1fa8c8e3a.png"/>
+          <p:cNvPr id="9" name="mermaid diagram" descr="04c3c64bb20212be.png"/>
           <p:cNvPicPr>
             <a:picLocks noChangeAspect="1"/>
           </p:cNvPicPr>
@@ -10534,8 +10534,8 @@
         </p:blipFill>
         <p:spPr>
           <a:xfrm>
-            <a:off x="3102616" y="1956816"/>
-            <a:ext cx="5986462" cy="1800225"/>
+            <a:off x="3262258" y="1664208"/>
+            <a:ext cx="5667178" cy="2983992"/>
           </a:xfrm>
           <a:prstGeom prst="rect">
             <a:avLst/>
@@ -10550,7 +10550,7 @@
         </p:nvSpPr>
         <p:spPr>
           <a:xfrm>
-            <a:off x="530352" y="3903345"/>
+            <a:off x="530352" y="4693920"/>
             <a:ext cx="11130991" cy="1341120"/>
           </a:xfrm>
           <a:prstGeom prst="roundRect">
@@ -10598,7 +10598,7 @@
         </p:nvSpPr>
         <p:spPr>
           <a:xfrm>
-            <a:off x="676656" y="4031360"/>
+            <a:off x="676656" y="4821936"/>
             <a:ext cx="45720" cy="1085088"/>
           </a:xfrm>
           <a:prstGeom prst="roundRect">
@@ -10644,7 +10644,7 @@
         </p:nvSpPr>
         <p:spPr>
           <a:xfrm>
-            <a:off x="877824" y="4022217"/>
+            <a:off x="877824" y="4812792"/>
             <a:ext cx="10564063" cy="1158240"/>
           </a:xfrm>
           <a:prstGeom prst="rect">
@@ -12241,7 +12241,7 @@
       </p:sp>
       <p:pic>
         <p:nvPicPr>
-          <p:cNvPr id="9" name="mermaid diagram" descr="d772db5e20b1a9dd.png"/>
+          <p:cNvPr id="9" name="mermaid diagram" descr="da66fa08805d999e.png"/>
           <p:cNvPicPr>
             <a:picLocks noChangeAspect="1"/>
           </p:cNvPicPr>
@@ -12255,8 +12255,8 @@
         </p:blipFill>
         <p:spPr>
           <a:xfrm>
-            <a:off x="530352" y="2727681"/>
-            <a:ext cx="4786326" cy="2426764"/>
+            <a:off x="664947" y="1682496"/>
+            <a:ext cx="4517136" cy="4517136"/>
           </a:xfrm>
           <a:prstGeom prst="rect">
             <a:avLst/>
@@ -16995,7 +16995,7 @@
       </p:sp>
       <p:pic>
         <p:nvPicPr>
-          <p:cNvPr id="9" name="mermaid diagram" descr="8470a97220d90526.png"/>
+          <p:cNvPr id="9" name="mermaid diagram" descr="1aa18360ba5e5c02.png"/>
           <p:cNvPicPr>
             <a:picLocks noChangeAspect="1"/>
           </p:cNvPicPr>
@@ -17009,8 +17009,8 @@
         </p:blipFill>
         <p:spPr>
           <a:xfrm>
-            <a:off x="1104184" y="1682496"/>
-            <a:ext cx="9983326" cy="4517136"/>
+            <a:off x="2432035" y="1682496"/>
+            <a:ext cx="7327624" cy="4517136"/>
           </a:xfrm>
           <a:prstGeom prst="rect">
             <a:avLst/>
@@ -18132,7 +18132,7 @@
       </p:sp>
       <p:pic>
         <p:nvPicPr>
-          <p:cNvPr id="9" name="mermaid diagram" descr="49f41a108752e8e1.png"/>
+          <p:cNvPr id="9" name="mermaid diagram" descr="9f70c21823e02228.png"/>
           <p:cNvPicPr>
             <a:picLocks noChangeAspect="1"/>
           </p:cNvPicPr>
@@ -18146,8 +18146,8 @@
         </p:blipFill>
         <p:spPr>
           <a:xfrm>
-            <a:off x="3560514" y="1664208"/>
-            <a:ext cx="5070666" cy="2295144"/>
+            <a:off x="4554938" y="1664208"/>
+            <a:ext cx="3081818" cy="2295144"/>
           </a:xfrm>
           <a:prstGeom prst="rect">
             <a:avLst/>
@@ -22075,7 +22075,7 @@
       </p:sp>
       <p:pic>
         <p:nvPicPr>
-          <p:cNvPr id="9" name="mermaid diagram" descr="7e0f2cc5b29c7c7d.png"/>
+          <p:cNvPr id="9" name="mermaid diagram" descr="0c46bcd733c4c8c8.png"/>
           <p:cNvPicPr>
             <a:picLocks noChangeAspect="1"/>
           </p:cNvPicPr>
@@ -22089,8 +22089,8 @@
         </p:blipFill>
         <p:spPr>
           <a:xfrm>
-            <a:off x="2987822" y="1664208"/>
-            <a:ext cx="6216050" cy="2545080"/>
+            <a:off x="530352" y="2046476"/>
+            <a:ext cx="4786326" cy="3789174"/>
           </a:xfrm>
           <a:prstGeom prst="rect">
             <a:avLst/>
@@ -22105,8 +22105,8 @@
         </p:nvSpPr>
         <p:spPr>
           <a:xfrm>
-            <a:off x="530352" y="4255008"/>
-            <a:ext cx="11130991" cy="807720"/>
+            <a:off x="5761917" y="1956816"/>
+            <a:ext cx="5899425" cy="1341120"/>
           </a:xfrm>
           <a:prstGeom prst="roundRect">
             <a:avLst>
@@ -22153,8 +22153,8 @@
         </p:nvSpPr>
         <p:spPr>
           <a:xfrm>
-            <a:off x="676656" y="4383024"/>
-            <a:ext cx="45720" cy="551688"/>
+            <a:off x="5908221" y="2084832"/>
+            <a:ext cx="45720" cy="1085088"/>
           </a:xfrm>
           <a:prstGeom prst="roundRect">
             <a:avLst>
@@ -22199,8 +22199,8 @@
         </p:nvSpPr>
         <p:spPr>
           <a:xfrm>
-            <a:off x="877824" y="4373880"/>
-            <a:ext cx="10564063" cy="624840"/>
+            <a:off x="6109389" y="2075688"/>
+            <a:ext cx="5332497" cy="1158240"/>
           </a:xfrm>
           <a:prstGeom prst="rect">
             <a:avLst/>
@@ -22242,8 +22242,8 @@
         </p:nvSpPr>
         <p:spPr>
           <a:xfrm>
-            <a:off x="530352" y="5227320"/>
-            <a:ext cx="11130991" cy="807720"/>
+            <a:off x="5761917" y="3462528"/>
+            <a:ext cx="5899425" cy="1341120"/>
           </a:xfrm>
           <a:prstGeom prst="roundRect">
             <a:avLst>
@@ -22290,8 +22290,8 @@
         </p:nvSpPr>
         <p:spPr>
           <a:xfrm>
-            <a:off x="676656" y="5355336"/>
-            <a:ext cx="45720" cy="551688"/>
+            <a:off x="5908221" y="3590544"/>
+            <a:ext cx="45720" cy="1085088"/>
           </a:xfrm>
           <a:prstGeom prst="roundRect">
             <a:avLst>
@@ -22336,8 +22336,8 @@
         </p:nvSpPr>
         <p:spPr>
           <a:xfrm>
-            <a:off x="877824" y="5346192"/>
-            <a:ext cx="10564063" cy="624840"/>
+            <a:off x="6109389" y="3581400"/>
+            <a:ext cx="5332497" cy="1158240"/>
           </a:xfrm>
           <a:prstGeom prst="rect">
             <a:avLst/>
@@ -26744,7 +26744,7 @@
       </p:sp>
       <p:pic>
         <p:nvPicPr>
-          <p:cNvPr id="9" name="mermaid diagram" descr="4ec08a1ec876b01c.png"/>
+          <p:cNvPr id="9" name="mermaid diagram" descr="77feda7222d51a91.png"/>
           <p:cNvPicPr>
             <a:picLocks noChangeAspect="1"/>
           </p:cNvPicPr>
@@ -26758,8 +26758,8 @@
         </p:blipFill>
         <p:spPr>
           <a:xfrm>
-            <a:off x="1688153" y="1925764"/>
-            <a:ext cx="8815387" cy="2543175"/>
+            <a:off x="2999675" y="1664208"/>
+            <a:ext cx="6192344" cy="2983992"/>
           </a:xfrm>
           <a:prstGeom prst="rect">
             <a:avLst/>
@@ -26774,7 +26774,7 @@
         </p:nvSpPr>
         <p:spPr>
           <a:xfrm>
-            <a:off x="530352" y="4615243"/>
+            <a:off x="530352" y="4693920"/>
             <a:ext cx="11130991" cy="1341120"/>
           </a:xfrm>
           <a:prstGeom prst="roundRect">
@@ -26822,7 +26822,7 @@
         </p:nvSpPr>
         <p:spPr>
           <a:xfrm>
-            <a:off x="676656" y="4743259"/>
+            <a:off x="676656" y="4821936"/>
             <a:ext cx="45720" cy="1085088"/>
           </a:xfrm>
           <a:prstGeom prst="roundRect">
@@ -26868,7 +26868,7 @@
         </p:nvSpPr>
         <p:spPr>
           <a:xfrm>
-            <a:off x="877824" y="4734115"/>
+            <a:off x="877824" y="4812792"/>
             <a:ext cx="10564063" cy="1158240"/>
           </a:xfrm>
           <a:prstGeom prst="rect">
@@ -28763,7 +28763,7 @@
       </p:sp>
       <p:pic>
         <p:nvPicPr>
-          <p:cNvPr id="9" name="mermaid diagram" descr="be7c6c0303852b06.png"/>
+          <p:cNvPr id="9" name="mermaid diagram" descr="917e0a52d2801801.png"/>
           <p:cNvPicPr>
             <a:picLocks noChangeAspect="1"/>
           </p:cNvPicPr>
@@ -28777,8 +28777,8 @@
         </p:blipFill>
         <p:spPr>
           <a:xfrm>
-            <a:off x="2998559" y="1664208"/>
-            <a:ext cx="6194576" cy="2979928"/>
+            <a:off x="530352" y="1821033"/>
+            <a:ext cx="4786326" cy="4240060"/>
           </a:xfrm>
           <a:prstGeom prst="rect">
             <a:avLst/>
@@ -28793,20 +28793,25 @@
         </p:nvSpPr>
         <p:spPr>
           <a:xfrm>
-            <a:off x="530352" y="4689856"/>
-            <a:ext cx="11130991" cy="1509775"/>
-          </a:xfrm>
-          <a:prstGeom prst="rect">
-            <a:avLst/>
-          </a:prstGeom>
-          <a:noFill/>
-        </p:spPr>
-        <p:txBody>
-          <a:bodyPr wrap="square" anchor="t" lIns="0" rIns="0" tIns="0" bIns="0">
-            <a:spAutoFit/>
-          </a:bodyPr>
-          <a:lstStyle/>
-          <a:p>
+            <a:off x="5761917" y="1956816"/>
+            <a:ext cx="5899425" cy="2982976"/>
+          </a:xfrm>
+          <a:prstGeom prst="rect">
+            <a:avLst/>
+          </a:prstGeom>
+          <a:noFill/>
+        </p:spPr>
+        <p:txBody>
+          <a:bodyPr wrap="square" anchor="t" lIns="0" rIns="0" tIns="0" bIns="0">
+            <a:spAutoFit/>
+          </a:bodyPr>
+          <a:lstStyle/>
+          <a:p>
+            <a:pPr>
+              <a:spcAft>
+                <a:spcPts val="800"/>
+              </a:spcAft>
+            </a:pPr>
             <a:r>
               <a:rPr sz="1600" b="1" i="0">
                 <a:solidFill>
@@ -32974,7 +32979,7 @@
       </p:sp>
       <p:pic>
         <p:nvPicPr>
-          <p:cNvPr id="9" name="mermaid diagram" descr="40e27b40e15d5162.png"/>
+          <p:cNvPr id="9" name="mermaid diagram" descr="cd9f1854ab09a120.png"/>
           <p:cNvPicPr>
             <a:picLocks noChangeAspect="1"/>
           </p:cNvPicPr>
@@ -32988,8 +32993,8 @@
         </p:blipFill>
         <p:spPr>
           <a:xfrm>
-            <a:off x="1349022" y="1664208"/>
-            <a:ext cx="9493650" cy="3517392"/>
+            <a:off x="2694733" y="1664208"/>
+            <a:ext cx="6802229" cy="3517392"/>
           </a:xfrm>
           <a:prstGeom prst="rect">
             <a:avLst/>
@@ -33648,7 +33653,7 @@
       </p:sp>
       <p:pic>
         <p:nvPicPr>
-          <p:cNvPr id="9" name="mermaid diagram" descr="1c14af4fbb8cd53b.png"/>
+          <p:cNvPr id="9" name="mermaid diagram" descr="6f2eac92cb62179f.png"/>
           <p:cNvPicPr>
             <a:picLocks noChangeAspect="1"/>
           </p:cNvPicPr>
@@ -33662,8 +33667,8 @@
         </p:blipFill>
         <p:spPr>
           <a:xfrm>
-            <a:off x="3375144" y="1664208"/>
-            <a:ext cx="5441405" cy="3808984"/>
+            <a:off x="1325273" y="1682496"/>
+            <a:ext cx="3196483" cy="4517136"/>
           </a:xfrm>
           <a:prstGeom prst="rect">
             <a:avLst/>
@@ -33678,20 +33683,25 @@
         </p:nvSpPr>
         <p:spPr>
           <a:xfrm>
-            <a:off x="530352" y="5518912"/>
-            <a:ext cx="11130991" cy="680720"/>
-          </a:xfrm>
-          <a:prstGeom prst="rect">
-            <a:avLst/>
-          </a:prstGeom>
-          <a:noFill/>
-        </p:spPr>
-        <p:txBody>
-          <a:bodyPr wrap="square" anchor="t" lIns="0" rIns="0" tIns="0" bIns="0">
-            <a:spAutoFit/>
-          </a:bodyPr>
-          <a:lstStyle/>
-          <a:p>
+            <a:off x="5761917" y="1956816"/>
+            <a:ext cx="5899425" cy="1324864"/>
+          </a:xfrm>
+          <a:prstGeom prst="rect">
+            <a:avLst/>
+          </a:prstGeom>
+          <a:noFill/>
+        </p:spPr>
+        <p:txBody>
+          <a:bodyPr wrap="square" anchor="t" lIns="0" rIns="0" tIns="0" bIns="0">
+            <a:spAutoFit/>
+          </a:bodyPr>
+          <a:lstStyle/>
+          <a:p>
+            <a:pPr>
+              <a:spcAft>
+                <a:spcPts val="800"/>
+              </a:spcAft>
+            </a:pPr>
             <a:r>
               <a:rPr sz="1600" b="0" i="0">
                 <a:solidFill>
@@ -38842,7 +38852,7 @@
       </p:sp>
       <p:pic>
         <p:nvPicPr>
-          <p:cNvPr id="9" name="mermaid diagram" descr="4f63bf6b50392052.png"/>
+          <p:cNvPr id="9" name="mermaid diagram" descr="94da0418c15641df.png"/>
           <p:cNvPicPr>
             <a:picLocks noChangeAspect="1"/>
           </p:cNvPicPr>
@@ -38856,8 +38866,8 @@
         </p:blipFill>
         <p:spPr>
           <a:xfrm>
-            <a:off x="530352" y="1956816"/>
-            <a:ext cx="11130991" cy="1770558"/>
+            <a:off x="1219809" y="1664208"/>
+            <a:ext cx="9752076" cy="3250692"/>
           </a:xfrm>
           <a:prstGeom prst="rect">
             <a:avLst/>
@@ -38872,7 +38882,7 @@
         </p:nvSpPr>
         <p:spPr>
           <a:xfrm>
-            <a:off x="530352" y="3873678"/>
+            <a:off x="530352" y="4960620"/>
             <a:ext cx="11130991" cy="1074420"/>
           </a:xfrm>
           <a:prstGeom prst="roundRect">
@@ -38920,7 +38930,7 @@
         </p:nvSpPr>
         <p:spPr>
           <a:xfrm>
-            <a:off x="676656" y="4001694"/>
+            <a:off x="676656" y="5088636"/>
             <a:ext cx="45720" cy="818388"/>
           </a:xfrm>
           <a:prstGeom prst="roundRect">
@@ -38966,7 +38976,7 @@
         </p:nvSpPr>
         <p:spPr>
           <a:xfrm>
-            <a:off x="877824" y="3992550"/>
+            <a:off x="877824" y="5079492"/>
             <a:ext cx="10564063" cy="891540"/>
           </a:xfrm>
           <a:prstGeom prst="rect">

--- a/content/W04/D1/slides/C2_W04_D01_half1_STUDENT.pptx
+++ b/content/W04/D1/slides/C2_W04_D01_half1_STUDENT.pptx
@@ -1791,7 +1791,7 @@
           </a:p>
           <a:p>
             <a:r>
-              <a:t>Transition: one crowd, counted three ways.</a:t>
+              <a:t>Transition: one network, counted in two units on two kinds of day.</a:t>
             </a:r>
           </a:p>
         </p:txBody>
@@ -1866,7 +1866,22 @@
           </a:p>
           <a:p>
             <a:r>
-              <a:t>same riders, and offers rose 29 percent on requests that rose 1.8 percent.</a:t>
+              <a:t>same riders, and offers rose 29 percent on requests that rose 1.8 percent. Read the 2018 pair as the</a:t>
+            </a:r>
+          </a:p>
+          <a:p>
+            <a:r>
+              <a:t>unit lesson and the 2026 pair as the day lesson. If asked whether journeys and boardings are one</a:t>
+            </a:r>
+          </a:p>
+          <a:p>
+            <a:r>
+              <a:t>count, say it is our reading of the two records and that DMRC's own definition says a journey counts</a:t>
+            </a:r>
+          </a:p>
+          <a:p>
+            <a:r>
+              <a:t>each line used.</a:t>
             </a:r>
           </a:p>
           <a:p>
@@ -1887,6 +1902,11 @@
           <a:p>
             <a:r>
               <a:t>https://www.republicworld.com/india/delhi-metro-breaks-all-time-record-with-8244-lakh-footfall-as-dtc-strike-sends-rush-soaring-2026-09-18-137241 (checked 12 October 2026)</a:t>
+            </a:r>
+          </a:p>
+          <a:p>
+            <a:r>
+              <a:t>https://www.deccanherald.com/india/delhi/delhi-metro-records-highest-ever-footfall-on-aug-29-2666561 (checked 12 October 2026)</a:t>
             </a:r>
           </a:p>
           <a:p>
@@ -19707,7 +19727,7 @@
                 </a:solidFill>
                 <a:latin typeface="Georgia"/>
               </a:rPr>
-              <a:t>Delhi Metro counts its crowd in three units</a:t>
+              <a:t>Delhi Metro's numbers differ by unit and by day</a:t>
             </a:r>
           </a:p>
         </p:txBody>
@@ -19742,7 +19762,7 @@
                 </a:solidFill>
                 <a:latin typeface="Calibri"/>
               </a:rPr>
-              <a:t>How can one network's crowd give three numbers, none of them wrong?</a:t>
+              <a:t>How can four numbers for one network, from 27 lakh to over 82 lakh, all be right?</a:t>
             </a:r>
           </a:p>
         </p:txBody>
@@ -19756,7 +19776,7 @@
         <p:spPr>
           <a:xfrm>
             <a:off x="530352" y="1956816"/>
-            <a:ext cx="3527450" cy="698500"/>
+            <a:ext cx="2577007" cy="476250"/>
           </a:xfrm>
           <a:prstGeom prst="rect">
             <a:avLst/>
@@ -19771,7 +19791,7 @@
           <a:p>
             <a:pPr algn="l"/>
             <a:r>
-              <a:rPr sz="4400" b="0" i="0">
+              <a:rPr sz="3000" b="0" i="0">
                 <a:solidFill>
                   <a:srgbClr val="5B3FD6"/>
                 </a:solidFill>
@@ -19790,8 +19810,8 @@
         </p:nvSpPr>
         <p:spPr>
           <a:xfrm>
-            <a:off x="530352" y="2691892"/>
-            <a:ext cx="3527450" cy="168656"/>
+            <a:off x="530352" y="2469642"/>
+            <a:ext cx="2577007" cy="168656"/>
           </a:xfrm>
           <a:prstGeom prst="rect">
             <a:avLst/>
@@ -19812,7 +19832,7 @@
                 </a:solidFill>
                 <a:latin typeface="Calibri"/>
               </a:rPr>
-              <a:t>RIDERS A DAY, FEBRUARY 2018</a:t>
+              <a:t>RIDERS A DAY</a:t>
             </a:r>
           </a:p>
         </p:txBody>
@@ -19825,8 +19845,8 @@
         </p:nvSpPr>
         <p:spPr>
           <a:xfrm>
-            <a:off x="530352" y="2893060"/>
-            <a:ext cx="3527450" cy="193421"/>
+            <a:off x="530352" y="2670810"/>
+            <a:ext cx="2577007" cy="350266"/>
           </a:xfrm>
           <a:prstGeom prst="rect">
             <a:avLst/>
@@ -19847,7 +19867,7 @@
                 </a:solidFill>
                 <a:latin typeface="Calibri"/>
               </a:rPr>
-              <a:t>gate count: one entry and one exit, one rider</a:t>
+              <a:t>February 2018: the old count took each rider once</a:t>
             </a:r>
           </a:p>
         </p:txBody>
@@ -19861,7 +19881,7 @@
         <p:spPr>
           <a:xfrm>
             <a:off x="530352" y="3145536"/>
-            <a:ext cx="3527450" cy="10972"/>
+            <a:ext cx="2577007" cy="10972"/>
           </a:xfrm>
           <a:prstGeom prst="rect">
             <a:avLst/>
@@ -19904,8 +19924,8 @@
         </p:nvSpPr>
         <p:spPr>
           <a:xfrm>
-            <a:off x="4332122" y="1956816"/>
-            <a:ext cx="3527450" cy="698500"/>
+            <a:off x="3381679" y="1956816"/>
+            <a:ext cx="2577007" cy="476250"/>
           </a:xfrm>
           <a:prstGeom prst="rect">
             <a:avLst/>
@@ -19920,7 +19940,7 @@
           <a:p>
             <a:pPr algn="l"/>
             <a:r>
-              <a:rPr sz="4400" b="0" i="0">
+              <a:rPr sz="3000" b="0" i="0">
                 <a:solidFill>
                   <a:srgbClr val="5B3FD6"/>
                 </a:solidFill>
@@ -19939,8 +19959,8 @@
         </p:nvSpPr>
         <p:spPr>
           <a:xfrm>
-            <a:off x="4332122" y="2691892"/>
-            <a:ext cx="3527450" cy="168656"/>
+            <a:off x="3381679" y="2469642"/>
+            <a:ext cx="2577007" cy="168656"/>
           </a:xfrm>
           <a:prstGeom prst="rect">
             <a:avLst/>
@@ -19961,7 +19981,7 @@
                 </a:solidFill>
                 <a:latin typeface="Calibri"/>
               </a:rPr>
-              <a:t>LINE UTILISATION, 29 MAY 2018</a:t>
+              <a:t>LINE USES</a:t>
             </a:r>
           </a:p>
         </p:txBody>
@@ -19974,8 +19994,8 @@
         </p:nvSpPr>
         <p:spPr>
           <a:xfrm>
-            <a:off x="4332122" y="2893060"/>
-            <a:ext cx="3527450" cy="193421"/>
+            <a:off x="3381679" y="2670810"/>
+            <a:ext cx="2577007" cy="350266"/>
           </a:xfrm>
           <a:prstGeom prst="rect">
             <a:avLst/>
@@ -19996,7 +20016,7 @@
                 </a:solidFill>
                 <a:latin typeface="Calibri"/>
               </a:rPr>
-              <a:t>every line ridden counts: three lines, three</a:t>
+              <a:t>29 May 2018: a rider on three lines counts three times</a:t>
             </a:r>
           </a:p>
         </p:txBody>
@@ -20009,8 +20029,8 @@
         </p:nvSpPr>
         <p:spPr>
           <a:xfrm>
-            <a:off x="4332122" y="3145536"/>
-            <a:ext cx="3527450" cy="10972"/>
+            <a:off x="3381679" y="3145536"/>
+            <a:ext cx="2577007" cy="10972"/>
           </a:xfrm>
           <a:prstGeom prst="rect">
             <a:avLst/>
@@ -20053,8 +20073,8 @@
         </p:nvSpPr>
         <p:spPr>
           <a:xfrm>
-            <a:off x="8133892" y="1956816"/>
-            <a:ext cx="3527450" cy="698500"/>
+            <a:off x="6233007" y="1956816"/>
+            <a:ext cx="2577007" cy="476250"/>
           </a:xfrm>
           <a:prstGeom prst="rect">
             <a:avLst/>
@@ -20069,13 +20089,13 @@
           <a:p>
             <a:pPr algn="l"/>
             <a:r>
-              <a:rPr sz="4400" b="0" i="0">
+              <a:rPr sz="3000" b="0" i="0">
                 <a:solidFill>
                   <a:srgbClr val="5B3FD6"/>
                 </a:solidFill>
                 <a:latin typeface="Georgia"/>
               </a:rPr>
-              <a:t>82,44,903</a:t>
+              <a:t>64.06 lakh</a:t>
             </a:r>
           </a:p>
         </p:txBody>
@@ -20088,8 +20108,8 @@
         </p:nvSpPr>
         <p:spPr>
           <a:xfrm>
-            <a:off x="8133892" y="2691892"/>
-            <a:ext cx="3527450" cy="168656"/>
+            <a:off x="6233007" y="2469642"/>
+            <a:ext cx="2577007" cy="168656"/>
           </a:xfrm>
           <a:prstGeom prst="rect">
             <a:avLst/>
@@ -20110,7 +20130,7 @@
                 </a:solidFill>
                 <a:latin typeface="Calibri"/>
               </a:rPr>
-              <a:t>BOARDINGS, 17 SEPTEMBER 2026</a:t>
+              <a:t>LINE USES, AVERAGE DAY</a:t>
             </a:r>
           </a:p>
         </p:txBody>
@@ -20123,8 +20143,8 @@
         </p:nvSpPr>
         <p:spPr>
           <a:xfrm>
-            <a:off x="8133892" y="2893060"/>
-            <a:ext cx="3527450" cy="193421"/>
+            <a:off x="6233007" y="2670810"/>
+            <a:ext cx="2577007" cy="193421"/>
           </a:xfrm>
           <a:prstGeom prst="rect">
             <a:avLst/>
@@ -20145,7 +20165,7 @@
                 </a:solidFill>
                 <a:latin typeface="Calibri"/>
               </a:rPr>
-              <a:t>a record day, in a third unit</a:t>
+              <a:t>2026, reported as "journeys"</a:t>
             </a:r>
           </a:p>
         </p:txBody>
@@ -20158,8 +20178,8 @@
         </p:nvSpPr>
         <p:spPr>
           <a:xfrm>
-            <a:off x="8133892" y="3145536"/>
-            <a:ext cx="3527450" cy="10972"/>
+            <a:off x="6233007" y="3145536"/>
+            <a:ext cx="2577007" cy="10972"/>
           </a:xfrm>
           <a:prstGeom prst="rect">
             <a:avLst/>
@@ -20202,8 +20222,157 @@
         </p:nvSpPr>
         <p:spPr>
           <a:xfrm>
+            <a:off x="9084335" y="1956816"/>
+            <a:ext cx="2577007" cy="476250"/>
+          </a:xfrm>
+          <a:prstGeom prst="rect">
+            <a:avLst/>
+          </a:prstGeom>
+          <a:noFill/>
+        </p:spPr>
+        <p:txBody>
+          <a:bodyPr wrap="square" anchor="t" lIns="0" rIns="0" tIns="0" bIns="0">
+            <a:spAutoFit/>
+          </a:bodyPr>
+          <a:lstStyle/>
+          <a:p>
+            <a:pPr algn="l"/>
+            <a:r>
+              <a:rPr sz="3000" b="0" i="0">
+                <a:solidFill>
+                  <a:srgbClr val="5B3FD6"/>
+                </a:solidFill>
+                <a:latin typeface="Georgia"/>
+              </a:rPr>
+              <a:t>82,44,903</a:t>
+            </a:r>
+          </a:p>
+        </p:txBody>
+      </p:sp>
+      <p:sp>
+        <p:nvSpPr>
+          <p:cNvPr id="22" name="TextBox 21"/>
+          <p:cNvSpPr txBox="1"/>
+          <p:nvPr/>
+        </p:nvSpPr>
+        <p:spPr>
+          <a:xfrm>
+            <a:off x="9084335" y="2469642"/>
+            <a:ext cx="2577007" cy="168656"/>
+          </a:xfrm>
+          <a:prstGeom prst="rect">
+            <a:avLst/>
+          </a:prstGeom>
+          <a:noFill/>
+        </p:spPr>
+        <p:txBody>
+          <a:bodyPr wrap="square" anchor="t" lIns="0" rIns="0" tIns="0" bIns="0">
+            <a:spAutoFit/>
+          </a:bodyPr>
+          <a:lstStyle/>
+          <a:p>
+            <a:pPr algn="l"/>
+            <a:r>
+              <a:rPr sz="800" b="1" i="0" spc="250">
+                <a:solidFill>
+                  <a:srgbClr val="1A0F5C"/>
+                </a:solidFill>
+                <a:latin typeface="Calibri"/>
+              </a:rPr>
+              <a:t>LINE USES, RECORD DAY</a:t>
+            </a:r>
+          </a:p>
+        </p:txBody>
+      </p:sp>
+      <p:sp>
+        <p:nvSpPr>
+          <p:cNvPr id="23" name="TextBox 22"/>
+          <p:cNvSpPr txBox="1"/>
+          <p:nvPr/>
+        </p:nvSpPr>
+        <p:spPr>
+          <a:xfrm>
+            <a:off x="9084335" y="2670810"/>
+            <a:ext cx="2577007" cy="350266"/>
+          </a:xfrm>
+          <a:prstGeom prst="rect">
+            <a:avLst/>
+          </a:prstGeom>
+          <a:noFill/>
+        </p:spPr>
+        <p:txBody>
+          <a:bodyPr wrap="square" anchor="t" lIns="0" rIns="0" tIns="0" bIns="0">
+            <a:spAutoFit/>
+          </a:bodyPr>
+          <a:lstStyle/>
+          <a:p>
+            <a:pPr algn="l"/>
+            <a:r>
+              <a:rPr sz="950" b="0" i="0">
+                <a:solidFill>
+                  <a:srgbClr val="6B6690"/>
+                </a:solidFill>
+                <a:latin typeface="Calibri"/>
+              </a:rPr>
+              <a:t>17 September 2026, reported as "boardings"</a:t>
+            </a:r>
+          </a:p>
+        </p:txBody>
+      </p:sp>
+      <p:sp>
+        <p:nvSpPr>
+          <p:cNvPr id="24" name="Rectangle 23"/>
+          <p:cNvSpPr/>
+          <p:nvPr/>
+        </p:nvSpPr>
+        <p:spPr>
+          <a:xfrm>
+            <a:off x="9084335" y="3145536"/>
+            <a:ext cx="2577007" cy="10972"/>
+          </a:xfrm>
+          <a:prstGeom prst="rect">
+            <a:avLst/>
+          </a:prstGeom>
+          <a:solidFill>
+            <a:srgbClr val="E4E1F1"/>
+          </a:solidFill>
+          <a:ln>
+            <a:noFill/>
+          </a:ln>
+          <a:effectLst/>
+        </p:spPr>
+        <p:style>
+          <a:lnRef idx="1">
+            <a:schemeClr val="accent1"/>
+          </a:lnRef>
+          <a:fillRef idx="3">
+            <a:schemeClr val="accent1"/>
+          </a:fillRef>
+          <a:effectRef idx="2">
+            <a:schemeClr val="accent1"/>
+          </a:effectRef>
+          <a:fontRef idx="minor">
+            <a:schemeClr val="lt1"/>
+          </a:fontRef>
+        </p:style>
+        <p:txBody>
+          <a:bodyPr rtlCol="0" anchor="ctr" wrap="square"/>
+          <a:lstStyle/>
+          <a:p>
+            <a:pPr algn="ctr"/>
+          </a:p>
+        </p:txBody>
+      </p:sp>
+      <p:sp>
+        <p:nvSpPr>
+          <p:cNvPr id="25" name="TextBox 24"/>
+          <p:cNvSpPr txBox="1"/>
+          <p:nvPr/>
+        </p:nvSpPr>
+        <p:spPr>
+          <a:xfrm>
             <a:off x="530352" y="3419856"/>
-            <a:ext cx="11130991" cy="1601216"/>
+            <a:ext cx="11130991" cy="2430272"/>
           </a:xfrm>
           <a:prstGeom prst="rect">
             <a:avLst/>
@@ -20228,14 +20397,14 @@
                 </a:solidFill>
                 <a:latin typeface="Calibri"/>
               </a:rPr>
-              <a:t>In 2018 the Delhi Metro Rail Corporation (DMRC) began counting "line utilisation": a rider from Noida City Centre to HUDA City Centre who changes across three lines counts three times, where the gate count counts one rider (PTI, the Press Trust of India). In 2026 the figures arrive as 64.06 lakh average daily "journeys" (The Tribune) and a record day of "boardings" (Republic World), each a different unit again; all checked 12 October 2026. A definition can move a number without moving the crowd.</a:t>
-            </a:r>
-          </a:p>
-        </p:txBody>
-      </p:sp>
-      <p:sp>
-        <p:nvSpPr>
-          <p:cNvPr id="22" name="Oval 21"/>
+              <a:t>In 2018 the Delhi Metro Rail Corporation (DMRC) began counting "line utilisation": a rider who changes across three lines from Noida City Centre to HUDA City Centre counts three times (PTI, the Press Trust of India). So the 2018 pair is one crowd in two units. The 2026 pair is one unit on two kinds of day: an average day (The Tribune) and the record day, when a bus strike sent riders to the Metro (DMRC's post, as Republic World carries it). That "journeys" and "boardings" name the same count is our reading, since the boardings record beat the earlier record of more than 81 lakh "passenger journeys" on 8 August 2025 (The Tribune). All checked 12 October 2026. A definition can move a number without moving the crowd, and so can the choice of day.</a:t>
+            </a:r>
+          </a:p>
+        </p:txBody>
+      </p:sp>
+      <p:sp>
+        <p:nvSpPr>
+          <p:cNvPr id="26" name="Oval 25"/>
           <p:cNvSpPr/>
           <p:nvPr/>
         </p:nvSpPr>
@@ -20279,7 +20448,7 @@
       </p:sp>
       <p:sp>
         <p:nvSpPr>
-          <p:cNvPr id="23" name="TextBox 22"/>
+          <p:cNvPr id="27" name="TextBox 26"/>
           <p:cNvSpPr txBox="1"/>
           <p:nvPr/>
         </p:nvSpPr>
@@ -20314,7 +20483,7 @@
       </p:sp>
       <p:sp>
         <p:nvSpPr>
-          <p:cNvPr id="24" name="Oval 23"/>
+          <p:cNvPr id="28" name="Oval 27"/>
           <p:cNvSpPr/>
           <p:nvPr/>
         </p:nvSpPr>
@@ -20358,7 +20527,7 @@
       </p:sp>
       <p:sp>
         <p:nvSpPr>
-          <p:cNvPr id="25" name="TextBox 24"/>
+          <p:cNvPr id="29" name="TextBox 28"/>
           <p:cNvSpPr txBox="1"/>
           <p:nvPr/>
         </p:nvSpPr>
@@ -20393,7 +20562,7 @@
       </p:sp>
       <p:sp>
         <p:nvSpPr>
-          <p:cNvPr id="26" name="Oval 25"/>
+          <p:cNvPr id="30" name="Oval 29"/>
           <p:cNvSpPr/>
           <p:nvPr/>
         </p:nvSpPr>
@@ -20437,7 +20606,7 @@
       </p:sp>
       <p:sp>
         <p:nvSpPr>
-          <p:cNvPr id="27" name="TextBox 26"/>
+          <p:cNvPr id="31" name="TextBox 30"/>
           <p:cNvSpPr txBox="1"/>
           <p:nvPr/>
         </p:nvSpPr>
@@ -20472,7 +20641,7 @@
       </p:sp>
       <p:sp>
         <p:nvSpPr>
-          <p:cNvPr id="28" name="TextBox 27"/>
+          <p:cNvPr id="32" name="TextBox 31"/>
           <p:cNvSpPr txBox="1"/>
           <p:nvPr/>
         </p:nvSpPr>

--- a/content/W04/D1/slides/C2_W04_D01_half1_STUDENT.pptx
+++ b/content/W04/D1/slides/C2_W04_D01_half1_STUDENT.pptx
@@ -9395,7 +9395,7 @@
         <p:spPr>
           <a:xfrm>
             <a:off x="530352" y="4559808"/>
-            <a:ext cx="11130991" cy="772160"/>
+            <a:ext cx="11130991" cy="1048512"/>
           </a:xfrm>
           <a:prstGeom prst="rect">
             <a:avLst/>
@@ -9420,7 +9420,7 @@
                 </a:solidFill>
                 <a:latin typeface="Calibri"/>
               </a:rPr>
-              <a:t>The before week begins 10 August 2026 and the after week 21 September 2026. These are twelve rows of the case's own driver_weeks; E and F drive in two of the three outer zones, where riders are few.</a:t>
+              <a:t>The before week begins 10 August 2026 and the after week 21 September 2026. These are twelve rows of the case's own driver_weeks; E and F drive in two of the three outer zones, where riders are few. E and F also keep shorter weeks than most drivers who idle like them, which chapter 2's full data shows.</a:t>
             </a:r>
           </a:p>
         </p:txBody>
@@ -10540,7 +10540,7 @@
       </p:sp>
       <p:pic>
         <p:nvPicPr>
-          <p:cNvPr id="9" name="mermaid diagram" descr="04c3c64bb20212be.png"/>
+          <p:cNvPr id="9" name="mermaid diagram" descr="9dc97cb1fa8c8e3a.png"/>
           <p:cNvPicPr>
             <a:picLocks noChangeAspect="1"/>
           </p:cNvPicPr>
@@ -10554,8 +10554,8 @@
         </p:blipFill>
         <p:spPr>
           <a:xfrm>
-            <a:off x="3262258" y="1664208"/>
-            <a:ext cx="5667178" cy="2983992"/>
+            <a:off x="3102616" y="1956816"/>
+            <a:ext cx="5986462" cy="1800225"/>
           </a:xfrm>
           <a:prstGeom prst="rect">
             <a:avLst/>
@@ -10570,7 +10570,7 @@
         </p:nvSpPr>
         <p:spPr>
           <a:xfrm>
-            <a:off x="530352" y="4693920"/>
+            <a:off x="530352" y="3903345"/>
             <a:ext cx="11130991" cy="1341120"/>
           </a:xfrm>
           <a:prstGeom prst="roundRect">
@@ -10618,7 +10618,7 @@
         </p:nvSpPr>
         <p:spPr>
           <a:xfrm>
-            <a:off x="676656" y="4821936"/>
+            <a:off x="676656" y="4031360"/>
             <a:ext cx="45720" cy="1085088"/>
           </a:xfrm>
           <a:prstGeom prst="roundRect">
@@ -10664,7 +10664,7 @@
         </p:nvSpPr>
         <p:spPr>
           <a:xfrm>
-            <a:off x="877824" y="4812792"/>
+            <a:off x="877824" y="4022217"/>
             <a:ext cx="10564063" cy="1158240"/>
           </a:xfrm>
           <a:prstGeom prst="rect">
@@ -12261,7 +12261,7 @@
       </p:sp>
       <p:pic>
         <p:nvPicPr>
-          <p:cNvPr id="9" name="mermaid diagram" descr="da66fa08805d999e.png"/>
+          <p:cNvPr id="9" name="mermaid diagram" descr="d772db5e20b1a9dd.png"/>
           <p:cNvPicPr>
             <a:picLocks noChangeAspect="1"/>
           </p:cNvPicPr>
@@ -12275,8 +12275,8 @@
         </p:blipFill>
         <p:spPr>
           <a:xfrm>
-            <a:off x="664947" y="1682496"/>
-            <a:ext cx="4517136" cy="4517136"/>
+            <a:off x="530352" y="2727681"/>
+            <a:ext cx="4786326" cy="2426764"/>
           </a:xfrm>
           <a:prstGeom prst="rect">
             <a:avLst/>
@@ -17015,7 +17015,7 @@
       </p:sp>
       <p:pic>
         <p:nvPicPr>
-          <p:cNvPr id="9" name="mermaid diagram" descr="1aa18360ba5e5c02.png"/>
+          <p:cNvPr id="9" name="mermaid diagram" descr="a2eda4e502f82a13.png"/>
           <p:cNvPicPr>
             <a:picLocks noChangeAspect="1"/>
           </p:cNvPicPr>
@@ -17029,8 +17029,8 @@
         </p:blipFill>
         <p:spPr>
           <a:xfrm>
-            <a:off x="2432035" y="1682496"/>
-            <a:ext cx="7327624" cy="4517136"/>
+            <a:off x="530352" y="1956816"/>
+            <a:ext cx="11130991" cy="2876434"/>
           </a:xfrm>
           <a:prstGeom prst="rect">
             <a:avLst/>
@@ -18152,7 +18152,7 @@
       </p:sp>
       <p:pic>
         <p:nvPicPr>
-          <p:cNvPr id="9" name="mermaid diagram" descr="9f70c21823e02228.png"/>
+          <p:cNvPr id="9" name="mermaid diagram" descr="49f41a108752e8e1.png"/>
           <p:cNvPicPr>
             <a:picLocks noChangeAspect="1"/>
           </p:cNvPicPr>
@@ -18166,8 +18166,8 @@
         </p:blipFill>
         <p:spPr>
           <a:xfrm>
-            <a:off x="4554938" y="1664208"/>
-            <a:ext cx="3081818" cy="2295144"/>
+            <a:off x="3560514" y="1664208"/>
+            <a:ext cx="5070666" cy="2295144"/>
           </a:xfrm>
           <a:prstGeom prst="rect">
             <a:avLst/>
@@ -22244,7 +22244,7 @@
       </p:sp>
       <p:pic>
         <p:nvPicPr>
-          <p:cNvPr id="9" name="mermaid diagram" descr="0c46bcd733c4c8c8.png"/>
+          <p:cNvPr id="9" name="mermaid diagram" descr="7e0f2cc5b29c7c7d.png"/>
           <p:cNvPicPr>
             <a:picLocks noChangeAspect="1"/>
           </p:cNvPicPr>
@@ -22258,8 +22258,8 @@
         </p:blipFill>
         <p:spPr>
           <a:xfrm>
-            <a:off x="530352" y="2046476"/>
-            <a:ext cx="4786326" cy="3789174"/>
+            <a:off x="2987822" y="1664208"/>
+            <a:ext cx="6216050" cy="2545080"/>
           </a:xfrm>
           <a:prstGeom prst="rect">
             <a:avLst/>
@@ -22274,8 +22274,8 @@
         </p:nvSpPr>
         <p:spPr>
           <a:xfrm>
-            <a:off x="5761917" y="1956816"/>
-            <a:ext cx="5899425" cy="1341120"/>
+            <a:off x="530352" y="4255008"/>
+            <a:ext cx="11130991" cy="807720"/>
           </a:xfrm>
           <a:prstGeom prst="roundRect">
             <a:avLst>
@@ -22322,8 +22322,8 @@
         </p:nvSpPr>
         <p:spPr>
           <a:xfrm>
-            <a:off x="5908221" y="2084832"/>
-            <a:ext cx="45720" cy="1085088"/>
+            <a:off x="676656" y="4383024"/>
+            <a:ext cx="45720" cy="551688"/>
           </a:xfrm>
           <a:prstGeom prst="roundRect">
             <a:avLst>
@@ -22368,8 +22368,8 @@
         </p:nvSpPr>
         <p:spPr>
           <a:xfrm>
-            <a:off x="6109389" y="2075688"/>
-            <a:ext cx="5332497" cy="1158240"/>
+            <a:off x="877824" y="4373880"/>
+            <a:ext cx="10564063" cy="624840"/>
           </a:xfrm>
           <a:prstGeom prst="rect">
             <a:avLst/>
@@ -22411,8 +22411,8 @@
         </p:nvSpPr>
         <p:spPr>
           <a:xfrm>
-            <a:off x="5761917" y="3462528"/>
-            <a:ext cx="5899425" cy="1341120"/>
+            <a:off x="530352" y="5227320"/>
+            <a:ext cx="11130991" cy="807720"/>
           </a:xfrm>
           <a:prstGeom prst="roundRect">
             <a:avLst>
@@ -22459,8 +22459,8 @@
         </p:nvSpPr>
         <p:spPr>
           <a:xfrm>
-            <a:off x="5908221" y="3590544"/>
-            <a:ext cx="45720" cy="1085088"/>
+            <a:off x="676656" y="5355336"/>
+            <a:ext cx="45720" cy="551688"/>
           </a:xfrm>
           <a:prstGeom prst="roundRect">
             <a:avLst>
@@ -22505,8 +22505,8 @@
         </p:nvSpPr>
         <p:spPr>
           <a:xfrm>
-            <a:off x="6109389" y="3581400"/>
-            <a:ext cx="5332497" cy="1158240"/>
+            <a:off x="877824" y="5346192"/>
+            <a:ext cx="10564063" cy="624840"/>
           </a:xfrm>
           <a:prstGeom prst="rect">
             <a:avLst/>
@@ -26913,7 +26913,7 @@
       </p:sp>
       <p:pic>
         <p:nvPicPr>
-          <p:cNvPr id="9" name="mermaid diagram" descr="77feda7222d51a91.png"/>
+          <p:cNvPr id="9" name="mermaid diagram" descr="4ec08a1ec876b01c.png"/>
           <p:cNvPicPr>
             <a:picLocks noChangeAspect="1"/>
           </p:cNvPicPr>
@@ -26927,8 +26927,8 @@
         </p:blipFill>
         <p:spPr>
           <a:xfrm>
-            <a:off x="2999675" y="1664208"/>
-            <a:ext cx="6192344" cy="2983992"/>
+            <a:off x="1688153" y="1925764"/>
+            <a:ext cx="8815387" cy="2543175"/>
           </a:xfrm>
           <a:prstGeom prst="rect">
             <a:avLst/>
@@ -26943,7 +26943,7 @@
         </p:nvSpPr>
         <p:spPr>
           <a:xfrm>
-            <a:off x="530352" y="4693920"/>
+            <a:off x="530352" y="4615243"/>
             <a:ext cx="11130991" cy="1341120"/>
           </a:xfrm>
           <a:prstGeom prst="roundRect">
@@ -26991,7 +26991,7 @@
         </p:nvSpPr>
         <p:spPr>
           <a:xfrm>
-            <a:off x="676656" y="4821936"/>
+            <a:off x="676656" y="4743259"/>
             <a:ext cx="45720" cy="1085088"/>
           </a:xfrm>
           <a:prstGeom prst="roundRect">
@@ -27037,7 +27037,7 @@
         </p:nvSpPr>
         <p:spPr>
           <a:xfrm>
-            <a:off x="877824" y="4812792"/>
+            <a:off x="877824" y="4734115"/>
             <a:ext cx="10564063" cy="1158240"/>
           </a:xfrm>
           <a:prstGeom prst="rect">
@@ -28932,7 +28932,7 @@
       </p:sp>
       <p:pic>
         <p:nvPicPr>
-          <p:cNvPr id="9" name="mermaid diagram" descr="917e0a52d2801801.png"/>
+          <p:cNvPr id="9" name="mermaid diagram" descr="be7c6c0303852b06.png"/>
           <p:cNvPicPr>
             <a:picLocks noChangeAspect="1"/>
           </p:cNvPicPr>
@@ -28946,8 +28946,8 @@
         </p:blipFill>
         <p:spPr>
           <a:xfrm>
-            <a:off x="530352" y="1821033"/>
-            <a:ext cx="4786326" cy="4240060"/>
+            <a:off x="2998559" y="1664208"/>
+            <a:ext cx="6194576" cy="2979928"/>
           </a:xfrm>
           <a:prstGeom prst="rect">
             <a:avLst/>
@@ -28962,25 +28962,20 @@
         </p:nvSpPr>
         <p:spPr>
           <a:xfrm>
-            <a:off x="5761917" y="1956816"/>
-            <a:ext cx="5899425" cy="2982976"/>
-          </a:xfrm>
-          <a:prstGeom prst="rect">
-            <a:avLst/>
-          </a:prstGeom>
-          <a:noFill/>
-        </p:spPr>
-        <p:txBody>
-          <a:bodyPr wrap="square" anchor="t" lIns="0" rIns="0" tIns="0" bIns="0">
-            <a:spAutoFit/>
-          </a:bodyPr>
-          <a:lstStyle/>
-          <a:p>
-            <a:pPr>
-              <a:spcAft>
-                <a:spcPts val="800"/>
-              </a:spcAft>
-            </a:pPr>
+            <a:off x="530352" y="4689856"/>
+            <a:ext cx="11130991" cy="1509775"/>
+          </a:xfrm>
+          <a:prstGeom prst="rect">
+            <a:avLst/>
+          </a:prstGeom>
+          <a:noFill/>
+        </p:spPr>
+        <p:txBody>
+          <a:bodyPr wrap="square" anchor="t" lIns="0" rIns="0" tIns="0" bIns="0">
+            <a:spAutoFit/>
+          </a:bodyPr>
+          <a:lstStyle/>
+          <a:p>
             <a:r>
               <a:rPr sz="1600" b="1" i="0">
                 <a:solidFill>
@@ -33148,7 +33143,7 @@
       </p:sp>
       <p:pic>
         <p:nvPicPr>
-          <p:cNvPr id="9" name="mermaid diagram" descr="cd9f1854ab09a120.png"/>
+          <p:cNvPr id="9" name="mermaid diagram" descr="af37cf4a9e170fba.png"/>
           <p:cNvPicPr>
             <a:picLocks noChangeAspect="1"/>
           </p:cNvPicPr>
@@ -33162,8 +33157,8 @@
         </p:blipFill>
         <p:spPr>
           <a:xfrm>
-            <a:off x="2694733" y="1664208"/>
-            <a:ext cx="6802229" cy="3517392"/>
+            <a:off x="530352" y="1956816"/>
+            <a:ext cx="11130991" cy="2530766"/>
           </a:xfrm>
           <a:prstGeom prst="rect">
             <a:avLst/>
@@ -33178,7 +33173,7 @@
         </p:nvSpPr>
         <p:spPr>
           <a:xfrm>
-            <a:off x="530352" y="5227320"/>
+            <a:off x="530352" y="4633886"/>
             <a:ext cx="11130991" cy="807720"/>
           </a:xfrm>
           <a:prstGeom prst="roundRect">
@@ -33226,7 +33221,7 @@
         </p:nvSpPr>
         <p:spPr>
           <a:xfrm>
-            <a:off x="676656" y="5355336"/>
+            <a:off x="676656" y="4761902"/>
             <a:ext cx="45720" cy="551688"/>
           </a:xfrm>
           <a:prstGeom prst="roundRect">
@@ -33272,7 +33267,7 @@
         </p:nvSpPr>
         <p:spPr>
           <a:xfrm>
-            <a:off x="877824" y="5346192"/>
+            <a:off x="877824" y="4752758"/>
             <a:ext cx="10564063" cy="624840"/>
           </a:xfrm>
           <a:prstGeom prst="rect">
@@ -33822,7 +33817,7 @@
       </p:sp>
       <p:pic>
         <p:nvPicPr>
-          <p:cNvPr id="9" name="mermaid diagram" descr="6f2eac92cb62179f.png"/>
+          <p:cNvPr id="9" name="mermaid diagram" descr="1c14af4fbb8cd53b.png"/>
           <p:cNvPicPr>
             <a:picLocks noChangeAspect="1"/>
           </p:cNvPicPr>
@@ -33836,8 +33831,8 @@
         </p:blipFill>
         <p:spPr>
           <a:xfrm>
-            <a:off x="1325273" y="1682496"/>
-            <a:ext cx="3196483" cy="4517136"/>
+            <a:off x="3375144" y="1664208"/>
+            <a:ext cx="5441405" cy="3808984"/>
           </a:xfrm>
           <a:prstGeom prst="rect">
             <a:avLst/>
@@ -33852,25 +33847,20 @@
         </p:nvSpPr>
         <p:spPr>
           <a:xfrm>
-            <a:off x="5761917" y="1956816"/>
-            <a:ext cx="5899425" cy="1324864"/>
-          </a:xfrm>
-          <a:prstGeom prst="rect">
-            <a:avLst/>
-          </a:prstGeom>
-          <a:noFill/>
-        </p:spPr>
-        <p:txBody>
-          <a:bodyPr wrap="square" anchor="t" lIns="0" rIns="0" tIns="0" bIns="0">
-            <a:spAutoFit/>
-          </a:bodyPr>
-          <a:lstStyle/>
-          <a:p>
-            <a:pPr>
-              <a:spcAft>
-                <a:spcPts val="800"/>
-              </a:spcAft>
-            </a:pPr>
+            <a:off x="530352" y="5518912"/>
+            <a:ext cx="11130991" cy="680720"/>
+          </a:xfrm>
+          <a:prstGeom prst="rect">
+            <a:avLst/>
+          </a:prstGeom>
+          <a:noFill/>
+        </p:spPr>
+        <p:txBody>
+          <a:bodyPr wrap="square" anchor="t" lIns="0" rIns="0" tIns="0" bIns="0">
+            <a:spAutoFit/>
+          </a:bodyPr>
+          <a:lstStyle/>
+          <a:p>
             <a:r>
               <a:rPr sz="1600" b="0" i="0">
                 <a:solidFill>
@@ -39021,7 +39011,7 @@
       </p:sp>
       <p:pic>
         <p:nvPicPr>
-          <p:cNvPr id="9" name="mermaid diagram" descr="94da0418c15641df.png"/>
+          <p:cNvPr id="9" name="mermaid diagram" descr="4f63bf6b50392052.png"/>
           <p:cNvPicPr>
             <a:picLocks noChangeAspect="1"/>
           </p:cNvPicPr>
@@ -39035,8 +39025,8 @@
         </p:blipFill>
         <p:spPr>
           <a:xfrm>
-            <a:off x="1219809" y="1664208"/>
-            <a:ext cx="9752076" cy="3250692"/>
+            <a:off x="530352" y="1956816"/>
+            <a:ext cx="11130991" cy="1770558"/>
           </a:xfrm>
           <a:prstGeom prst="rect">
             <a:avLst/>
@@ -39051,7 +39041,7 @@
         </p:nvSpPr>
         <p:spPr>
           <a:xfrm>
-            <a:off x="530352" y="4960620"/>
+            <a:off x="530352" y="3873678"/>
             <a:ext cx="11130991" cy="1074420"/>
           </a:xfrm>
           <a:prstGeom prst="roundRect">
@@ -39099,7 +39089,7 @@
         </p:nvSpPr>
         <p:spPr>
           <a:xfrm>
-            <a:off x="676656" y="5088636"/>
+            <a:off x="676656" y="4001694"/>
             <a:ext cx="45720" cy="818388"/>
           </a:xfrm>
           <a:prstGeom prst="roundRect">
@@ -39145,7 +39135,7 @@
         </p:nvSpPr>
         <p:spPr>
           <a:xfrm>
-            <a:off x="877824" y="5079492"/>
+            <a:off x="877824" y="3992550"/>
             <a:ext cx="10564063" cy="891540"/>
           </a:xfrm>
           <a:prstGeom prst="rect">
